--- a/Docs/pics/Workflow_NADIA_ESP.pptx
+++ b/Docs/pics/Workflow_NADIA_ESP.pptx
@@ -746,8 +746,8 @@
         </p:nvSpPr>
         <p:spPr>
           <a:xfrm>
-            <a:off x="5943600" y="201168"/>
-            <a:ext cx="5303520" cy="731520"/>
+            <a:off x="5046135" y="521208"/>
+            <a:ext cx="6200985" cy="731520"/>
           </a:xfrm>
           <a:prstGeom prst="rect">
             <a:avLst/>
@@ -763,130 +763,151 @@
               <a:buNone/>
             </a:pPr>
             <a:r>
-              <a:rPr lang="en-US" sz="1800" b="1" dirty="0">
+              <a:rPr lang="en-US" sz="3200" b="1" dirty="0">
                 <a:solidFill>
                   <a:srgbClr val="2A6B42"/>
                 </a:solidFill>
               </a:rPr>
               <a:t>Procesamiento de datos brutos</a:t>
             </a:r>
-            <a:endParaRPr lang="en-US" sz="1800" dirty="0"/>
+            <a:endParaRPr lang="en-US" sz="3200" dirty="0"/>
           </a:p>
           <a:p>
             <a:pPr marL="0" indent="0" algn="ctr">
               <a:buNone/>
             </a:pPr>
             <a:r>
-              <a:rPr lang="en-US" sz="1800" b="1" dirty="0">
+              <a:rPr lang="en-US" sz="3200" b="1" dirty="0">
                 <a:solidFill>
                   <a:srgbClr val="2A6B42"/>
                 </a:solidFill>
               </a:rPr>
               <a:t>fuera de NADIA</a:t>
             </a:r>
-            <a:endParaRPr lang="en-US" sz="1800" dirty="0"/>
+            <a:endParaRPr lang="en-US" sz="3200" dirty="0"/>
           </a:p>
         </p:txBody>
       </p:sp>
-      <p:sp>
-        <p:nvSpPr>
-          <p:cNvPr id="6" name="box_datos_brutos"/>
-          <p:cNvSpPr/>
+      <p:grpSp>
+        <p:nvGrpSpPr>
+          <p:cNvPr id="52" name="Group 51">
+            <a:extLst>
+              <a:ext uri="{FF2B5EF4-FFF2-40B4-BE49-F238E27FC236}">
+                <a16:creationId xmlns:a16="http://schemas.microsoft.com/office/drawing/2014/main" id="{CDBB1EA9-9FC1-40F3-8A26-2B9FBD948335}"/>
+              </a:ext>
+            </a:extLst>
+          </p:cNvPr>
+          <p:cNvGrpSpPr/>
           <p:nvPr/>
-        </p:nvSpPr>
-        <p:spPr>
+        </p:nvGrpSpPr>
+        <p:grpSpPr>
           <a:xfrm>
-            <a:off x="548640" y="182880"/>
+            <a:off x="2019800" y="226568"/>
             <a:ext cx="2011680" cy="594360"/>
+            <a:chOff x="548640" y="182880"/>
+            <a:chExt cx="2011680" cy="594360"/>
           </a:xfrm>
-          <a:prstGeom prst="roundRect">
-            <a:avLst>
-              <a:gd name="adj" fmla="val 12308"/>
-            </a:avLst>
-          </a:prstGeom>
-          <a:solidFill>
-            <a:srgbClr val="FFFFFF"/>
-          </a:solidFill>
-          <a:ln w="15240">
+        </p:grpSpPr>
+        <p:sp>
+          <p:nvSpPr>
+            <p:cNvPr id="6" name="box_datos_brutos"/>
+            <p:cNvSpPr/>
+            <p:nvPr/>
+          </p:nvSpPr>
+          <p:spPr>
+            <a:xfrm>
+              <a:off x="548640" y="182880"/>
+              <a:ext cx="2011680" cy="594360"/>
+            </a:xfrm>
+            <a:prstGeom prst="roundRect">
+              <a:avLst>
+                <a:gd name="adj" fmla="val 12308"/>
+              </a:avLst>
+            </a:prstGeom>
             <a:solidFill>
-              <a:srgbClr val="5AAA78"/>
+              <a:srgbClr val="FFFFFF"/>
             </a:solidFill>
-            <a:prstDash val="solid"/>
-          </a:ln>
-        </p:spPr>
-      </p:sp>
-      <p:sp>
-        <p:nvSpPr>
-          <p:cNvPr id="7" name="text_datos_brutos"/>
-          <p:cNvSpPr txBox="1"/>
-          <p:nvPr/>
-        </p:nvSpPr>
-        <p:spPr>
-          <a:xfrm>
-            <a:off x="548640" y="201168"/>
-            <a:ext cx="2011680" cy="292608"/>
-          </a:xfrm>
-          <a:prstGeom prst="rect">
-            <a:avLst/>
-          </a:prstGeom>
-          <a:noFill/>
-          <a:ln/>
-        </p:spPr>
-        <p:txBody>
-          <a:bodyPr wrap="square" lIns="0" tIns="0" rIns="0" bIns="0" rtlCol="0" anchor="ctr"/>
-          <a:lstStyle/>
-          <a:p>
-            <a:pPr marL="0" indent="0" algn="ctr">
-              <a:buNone/>
-            </a:pPr>
-            <a:r>
-              <a:rPr lang="en-US" sz="1200" b="1" dirty="0">
-                <a:solidFill>
-                  <a:srgbClr val="1A4A2E"/>
-                </a:solidFill>
-              </a:rPr>
-              <a:t>Datos brutos</a:t>
-            </a:r>
-            <a:endParaRPr lang="en-US" sz="1200" dirty="0"/>
-          </a:p>
-        </p:txBody>
-      </p:sp>
-      <p:sp>
-        <p:nvSpPr>
-          <p:cNvPr id="8" name="text_datos_brutos_sub"/>
-          <p:cNvSpPr txBox="1"/>
-          <p:nvPr/>
-        </p:nvSpPr>
-        <p:spPr>
-          <a:xfrm>
-            <a:off x="548640" y="493776"/>
-            <a:ext cx="2011680" cy="256032"/>
-          </a:xfrm>
-          <a:prstGeom prst="rect">
-            <a:avLst/>
-          </a:prstGeom>
-          <a:noFill/>
-          <a:ln/>
-        </p:spPr>
-        <p:txBody>
-          <a:bodyPr wrap="square" lIns="0" tIns="0" rIns="0" bIns="0" rtlCol="0" anchor="ctr"/>
-          <a:lstStyle/>
-          <a:p>
-            <a:pPr marL="0" indent="0" algn="ctr">
-              <a:buNone/>
-            </a:pPr>
-            <a:r>
-              <a:rPr lang="en-US" sz="1000" dirty="0">
-                <a:solidFill>
-                  <a:srgbClr val="2A6B42"/>
-                </a:solidFill>
-              </a:rPr>
-              <a:t>de nanoLC-MS/MS</a:t>
-            </a:r>
-            <a:endParaRPr lang="en-US" sz="1000" dirty="0"/>
-          </a:p>
-        </p:txBody>
-      </p:sp>
+            <a:ln w="15240">
+              <a:solidFill>
+                <a:srgbClr val="5AAA78"/>
+              </a:solidFill>
+              <a:prstDash val="solid"/>
+            </a:ln>
+          </p:spPr>
+        </p:sp>
+        <p:sp>
+          <p:nvSpPr>
+            <p:cNvPr id="7" name="text_datos_brutos"/>
+            <p:cNvSpPr txBox="1"/>
+            <p:nvPr/>
+          </p:nvSpPr>
+          <p:spPr>
+            <a:xfrm>
+              <a:off x="548640" y="201168"/>
+              <a:ext cx="2011680" cy="292608"/>
+            </a:xfrm>
+            <a:prstGeom prst="rect">
+              <a:avLst/>
+            </a:prstGeom>
+            <a:noFill/>
+            <a:ln/>
+          </p:spPr>
+          <p:txBody>
+            <a:bodyPr wrap="square" lIns="0" tIns="0" rIns="0" bIns="0" rtlCol="0" anchor="ctr"/>
+            <a:lstStyle/>
+            <a:p>
+              <a:pPr marL="0" indent="0" algn="ctr">
+                <a:buNone/>
+              </a:pPr>
+              <a:r>
+                <a:rPr lang="en-US" sz="1400" b="1" dirty="0">
+                  <a:solidFill>
+                    <a:srgbClr val="1A4A2E"/>
+                  </a:solidFill>
+                </a:rPr>
+                <a:t>Datos brutos</a:t>
+              </a:r>
+              <a:endParaRPr lang="en-US" sz="1400" dirty="0"/>
+            </a:p>
+          </p:txBody>
+        </p:sp>
+        <p:sp>
+          <p:nvSpPr>
+            <p:cNvPr id="8" name="text_datos_brutos_sub"/>
+            <p:cNvSpPr txBox="1"/>
+            <p:nvPr/>
+          </p:nvSpPr>
+          <p:spPr>
+            <a:xfrm>
+              <a:off x="548640" y="493776"/>
+              <a:ext cx="2011680" cy="256032"/>
+            </a:xfrm>
+            <a:prstGeom prst="rect">
+              <a:avLst/>
+            </a:prstGeom>
+            <a:noFill/>
+            <a:ln/>
+          </p:spPr>
+          <p:txBody>
+            <a:bodyPr wrap="square" lIns="0" tIns="0" rIns="0" bIns="0" rtlCol="0" anchor="ctr"/>
+            <a:lstStyle/>
+            <a:p>
+              <a:pPr marL="0" indent="0" algn="ctr">
+                <a:buNone/>
+              </a:pPr>
+              <a:r>
+                <a:rPr lang="en-US" sz="1050" dirty="0">
+                  <a:solidFill>
+                    <a:srgbClr val="2A6B42"/>
+                  </a:solidFill>
+                </a:rPr>
+                <a:t>de nanoLC-MS/MS</a:t>
+              </a:r>
+              <a:endParaRPr lang="en-US" sz="1050" dirty="0"/>
+            </a:p>
+          </p:txBody>
+        </p:sp>
+      </p:grpSp>
       <p:sp>
         <p:nvSpPr>
           <p:cNvPr id="9" name="arrow_sec1"/>
@@ -895,7 +916,7 @@
         </p:nvSpPr>
         <p:spPr>
           <a:xfrm>
-            <a:off x="1554480" y="777240"/>
+            <a:off x="3023768" y="820928"/>
             <a:ext cx="0" cy="274320"/>
           </a:xfrm>
           <a:prstGeom prst="line">
@@ -911,105 +932,126 @@
           </a:ln>
         </p:spPr>
       </p:sp>
-      <p:sp>
-        <p:nvSpPr>
-          <p:cNvPr id="10" name="box_spectronaut"/>
-          <p:cNvSpPr/>
+      <p:grpSp>
+        <p:nvGrpSpPr>
+          <p:cNvPr id="51" name="Group 50">
+            <a:extLst>
+              <a:ext uri="{FF2B5EF4-FFF2-40B4-BE49-F238E27FC236}">
+                <a16:creationId xmlns:a16="http://schemas.microsoft.com/office/drawing/2014/main" id="{372EEA64-6CCD-4D90-8FEC-9CDA924D42F0}"/>
+              </a:ext>
+            </a:extLst>
+          </p:cNvPr>
+          <p:cNvGrpSpPr/>
           <p:nvPr/>
-        </p:nvSpPr>
-        <p:spPr>
+        </p:nvGrpSpPr>
+        <p:grpSpPr>
           <a:xfrm>
-            <a:off x="548640" y="1051560"/>
+            <a:off x="2019800" y="1095248"/>
             <a:ext cx="2011680" cy="594360"/>
+            <a:chOff x="548640" y="1051560"/>
+            <a:chExt cx="2011680" cy="594360"/>
           </a:xfrm>
-          <a:prstGeom prst="roundRect">
-            <a:avLst>
-              <a:gd name="adj" fmla="val 12308"/>
-            </a:avLst>
-          </a:prstGeom>
-          <a:solidFill>
-            <a:srgbClr val="FFFFFF"/>
-          </a:solidFill>
-          <a:ln w="15240">
+        </p:grpSpPr>
+        <p:sp>
+          <p:nvSpPr>
+            <p:cNvPr id="10" name="box_spectronaut"/>
+            <p:cNvSpPr/>
+            <p:nvPr/>
+          </p:nvSpPr>
+          <p:spPr>
+            <a:xfrm>
+              <a:off x="548640" y="1051560"/>
+              <a:ext cx="2011680" cy="594360"/>
+            </a:xfrm>
+            <a:prstGeom prst="roundRect">
+              <a:avLst>
+                <a:gd name="adj" fmla="val 12308"/>
+              </a:avLst>
+            </a:prstGeom>
             <a:solidFill>
-              <a:srgbClr val="5AAA78"/>
+              <a:srgbClr val="FFFFFF"/>
             </a:solidFill>
-            <a:prstDash val="solid"/>
-          </a:ln>
-        </p:spPr>
-      </p:sp>
-      <p:sp>
-        <p:nvSpPr>
-          <p:cNvPr id="11" name="text_spectronaut"/>
-          <p:cNvSpPr txBox="1"/>
-          <p:nvPr/>
-        </p:nvSpPr>
-        <p:spPr>
-          <a:xfrm>
-            <a:off x="548640" y="1069848"/>
-            <a:ext cx="2011680" cy="274320"/>
-          </a:xfrm>
-          <a:prstGeom prst="rect">
-            <a:avLst/>
-          </a:prstGeom>
-          <a:noFill/>
-          <a:ln/>
-        </p:spPr>
-        <p:txBody>
-          <a:bodyPr wrap="square" lIns="0" tIns="0" rIns="0" bIns="0" rtlCol="0" anchor="ctr"/>
-          <a:lstStyle/>
-          <a:p>
-            <a:pPr marL="0" indent="0" algn="ctr">
-              <a:buNone/>
-            </a:pPr>
-            <a:r>
-              <a:rPr lang="en-US" sz="1200" b="1" dirty="0">
-                <a:solidFill>
-                  <a:srgbClr val="1A4A2E"/>
-                </a:solidFill>
-              </a:rPr>
-              <a:t>Spectronaut</a:t>
-            </a:r>
-            <a:endParaRPr lang="en-US" sz="1200" dirty="0"/>
-          </a:p>
-        </p:txBody>
-      </p:sp>
-      <p:sp>
-        <p:nvSpPr>
-          <p:cNvPr id="12" name="text_spectronaut_sub"/>
-          <p:cNvSpPr txBox="1"/>
-          <p:nvPr/>
-        </p:nvSpPr>
-        <p:spPr>
-          <a:xfrm>
-            <a:off x="548640" y="1344168"/>
-            <a:ext cx="2011680" cy="256032"/>
-          </a:xfrm>
-          <a:prstGeom prst="rect">
-            <a:avLst/>
-          </a:prstGeom>
-          <a:noFill/>
-          <a:ln/>
-        </p:spPr>
-        <p:txBody>
-          <a:bodyPr wrap="square" lIns="0" tIns="0" rIns="0" bIns="0" rtlCol="0" anchor="ctr"/>
-          <a:lstStyle/>
-          <a:p>
-            <a:pPr marL="0" indent="0" algn="ctr">
-              <a:buNone/>
-            </a:pPr>
-            <a:r>
-              <a:rPr lang="en-US" sz="1000" dirty="0">
-                <a:solidFill>
-                  <a:srgbClr val="2A6B42"/>
-                </a:solidFill>
-              </a:rPr>
-              <a:t>Inferencia de proteínas</a:t>
-            </a:r>
-            <a:endParaRPr lang="en-US" sz="1000" dirty="0"/>
-          </a:p>
-        </p:txBody>
-      </p:sp>
+            <a:ln w="15240">
+              <a:solidFill>
+                <a:srgbClr val="5AAA78"/>
+              </a:solidFill>
+              <a:prstDash val="solid"/>
+            </a:ln>
+          </p:spPr>
+        </p:sp>
+        <p:sp>
+          <p:nvSpPr>
+            <p:cNvPr id="11" name="text_spectronaut"/>
+            <p:cNvSpPr txBox="1"/>
+            <p:nvPr/>
+          </p:nvSpPr>
+          <p:spPr>
+            <a:xfrm>
+              <a:off x="548640" y="1069848"/>
+              <a:ext cx="2011680" cy="274320"/>
+            </a:xfrm>
+            <a:prstGeom prst="rect">
+              <a:avLst/>
+            </a:prstGeom>
+            <a:noFill/>
+            <a:ln/>
+          </p:spPr>
+          <p:txBody>
+            <a:bodyPr wrap="square" lIns="0" tIns="0" rIns="0" bIns="0" rtlCol="0" anchor="ctr"/>
+            <a:lstStyle/>
+            <a:p>
+              <a:pPr marL="0" indent="0" algn="ctr">
+                <a:buNone/>
+              </a:pPr>
+              <a:r>
+                <a:rPr lang="en-US" sz="1400" b="1" dirty="0">
+                  <a:solidFill>
+                    <a:srgbClr val="1A4A2E"/>
+                  </a:solidFill>
+                </a:rPr>
+                <a:t>Spectronaut</a:t>
+              </a:r>
+              <a:endParaRPr lang="en-US" sz="1400" dirty="0"/>
+            </a:p>
+          </p:txBody>
+        </p:sp>
+        <p:sp>
+          <p:nvSpPr>
+            <p:cNvPr id="12" name="text_spectronaut_sub"/>
+            <p:cNvSpPr txBox="1"/>
+            <p:nvPr/>
+          </p:nvSpPr>
+          <p:spPr>
+            <a:xfrm>
+              <a:off x="548640" y="1344168"/>
+              <a:ext cx="2011680" cy="256032"/>
+            </a:xfrm>
+            <a:prstGeom prst="rect">
+              <a:avLst/>
+            </a:prstGeom>
+            <a:noFill/>
+            <a:ln/>
+          </p:spPr>
+          <p:txBody>
+            <a:bodyPr wrap="square" lIns="0" tIns="0" rIns="0" bIns="0" rtlCol="0" anchor="ctr"/>
+            <a:lstStyle/>
+            <a:p>
+              <a:pPr marL="0" indent="0" algn="ctr">
+                <a:buNone/>
+              </a:pPr>
+              <a:r>
+                <a:rPr lang="en-US" sz="1050" dirty="0">
+                  <a:solidFill>
+                    <a:srgbClr val="2A6B42"/>
+                  </a:solidFill>
+                </a:rPr>
+                <a:t>Inferencia de proteínas</a:t>
+              </a:r>
+              <a:endParaRPr lang="en-US" sz="1050" dirty="0"/>
+            </a:p>
+          </p:txBody>
+        </p:sp>
+      </p:grpSp>
       <p:sp>
         <p:nvSpPr>
           <p:cNvPr id="13" name="sec2_bg"/>
@@ -1018,7 +1060,7 @@
         </p:nvSpPr>
         <p:spPr>
           <a:xfrm>
-            <a:off x="137160" y="1938528"/>
+            <a:off x="109984" y="1918208"/>
             <a:ext cx="11704320" cy="4663440"/>
           </a:xfrm>
           <a:prstGeom prst="roundRect">
@@ -1106,7 +1148,7 @@
         </p:nvSpPr>
         <p:spPr>
           <a:xfrm>
-            <a:off x="4114800" y="1993392"/>
+            <a:off x="4114800" y="2078058"/>
             <a:ext cx="7315200" cy="320040"/>
           </a:xfrm>
           <a:prstGeom prst="rect">
@@ -1117,122 +1159,172 @@
         </p:spPr>
         <p:txBody>
           <a:bodyPr wrap="square" rtlCol="0" anchor="ctr"/>
-          <a:lstStyle/>
+          <a:lstStyle>
+            <a:lvl1pPr indent="0" algn="ctr">
+              <a:buNone/>
+              <a:defRPr sz="3200" b="1">
+                <a:solidFill>
+                  <a:srgbClr val="2A6B42"/>
+                </a:solidFill>
+              </a:defRPr>
+            </a:lvl1pPr>
+          </a:lstStyle>
           <a:p>
-            <a:pPr marL="0" indent="0" algn="ctr">
-              <a:buNone/>
-            </a:pPr>
-            <a:r>
-              <a:rPr lang="en-US" sz="1800" b="1" dirty="0">
+            <a:r>
+              <a:rPr lang="en-US" dirty="0" err="1">
                 <a:solidFill>
                   <a:srgbClr val="1A3A6B"/>
                 </a:solidFill>
               </a:rPr>
-              <a:t>Procesamiento dependiente de NADIA</a:t>
-            </a:r>
-            <a:endParaRPr lang="en-US" sz="1800" dirty="0"/>
+              <a:t>Procesamiento</a:t>
+            </a:r>
+            <a:r>
+              <a:rPr lang="en-US" dirty="0">
+                <a:solidFill>
+                  <a:srgbClr val="1A3A6B"/>
+                </a:solidFill>
+              </a:rPr>
+              <a:t> </a:t>
+            </a:r>
+            <a:r>
+              <a:rPr lang="en-US" dirty="0" err="1">
+                <a:solidFill>
+                  <a:srgbClr val="1A3A6B"/>
+                </a:solidFill>
+              </a:rPr>
+              <a:t>dependiente</a:t>
+            </a:r>
+            <a:r>
+              <a:rPr lang="en-US" dirty="0">
+                <a:solidFill>
+                  <a:srgbClr val="1A3A6B"/>
+                </a:solidFill>
+              </a:rPr>
+              <a:t> de NADIA</a:t>
+            </a:r>
           </a:p>
         </p:txBody>
       </p:sp>
-      <p:sp>
-        <p:nvSpPr>
-          <p:cNvPr id="17" name="box_preprocesamiento"/>
-          <p:cNvSpPr/>
+      <p:grpSp>
+        <p:nvGrpSpPr>
+          <p:cNvPr id="50" name="Group 49">
+            <a:extLst>
+              <a:ext uri="{FF2B5EF4-FFF2-40B4-BE49-F238E27FC236}">
+                <a16:creationId xmlns:a16="http://schemas.microsoft.com/office/drawing/2014/main" id="{615A0462-D31D-47D1-84CF-32F9B635FBF1}"/>
+              </a:ext>
+            </a:extLst>
+          </p:cNvPr>
+          <p:cNvGrpSpPr/>
           <p:nvPr/>
-        </p:nvSpPr>
-        <p:spPr>
+        </p:nvGrpSpPr>
+        <p:grpSpPr>
           <a:xfrm>
-            <a:off x="502920" y="2377440"/>
+            <a:off x="1745480" y="2201672"/>
             <a:ext cx="2560320" cy="640080"/>
+            <a:chOff x="1188720" y="2157984"/>
+            <a:chExt cx="2560320" cy="640080"/>
           </a:xfrm>
-          <a:prstGeom prst="roundRect">
-            <a:avLst>
-              <a:gd name="adj" fmla="val 11429"/>
-            </a:avLst>
-          </a:prstGeom>
-          <a:solidFill>
-            <a:srgbClr val="FFFFFF"/>
-          </a:solidFill>
-          <a:ln w="15240">
+        </p:grpSpPr>
+        <p:sp>
+          <p:nvSpPr>
+            <p:cNvPr id="17" name="box_preprocesamiento"/>
+            <p:cNvSpPr/>
+            <p:nvPr/>
+          </p:nvSpPr>
+          <p:spPr>
+            <a:xfrm>
+              <a:off x="1188720" y="2157984"/>
+              <a:ext cx="2560320" cy="640080"/>
+            </a:xfrm>
+            <a:prstGeom prst="roundRect">
+              <a:avLst>
+                <a:gd name="adj" fmla="val 11429"/>
+              </a:avLst>
+            </a:prstGeom>
             <a:solidFill>
-              <a:srgbClr val="4A72B8"/>
+              <a:srgbClr val="FFFFFF"/>
             </a:solidFill>
-            <a:prstDash val="solid"/>
-          </a:ln>
-        </p:spPr>
-      </p:sp>
-      <p:sp>
-        <p:nvSpPr>
-          <p:cNvPr id="18" name="text_preprocesamiento"/>
-          <p:cNvSpPr txBox="1"/>
-          <p:nvPr/>
-        </p:nvSpPr>
-        <p:spPr>
-          <a:xfrm>
-            <a:off x="502920" y="2395728"/>
-            <a:ext cx="2560320" cy="274320"/>
-          </a:xfrm>
-          <a:prstGeom prst="rect">
-            <a:avLst/>
-          </a:prstGeom>
-          <a:noFill/>
-          <a:ln/>
-        </p:spPr>
-        <p:txBody>
-          <a:bodyPr wrap="square" lIns="0" tIns="0" rIns="0" bIns="0" rtlCol="0" anchor="ctr"/>
-          <a:lstStyle/>
-          <a:p>
-            <a:pPr marL="0" indent="0" algn="ctr">
-              <a:buNone/>
-            </a:pPr>
-            <a:r>
-              <a:rPr lang="en-US" sz="1100" b="1" dirty="0">
-                <a:solidFill>
-                  <a:srgbClr val="1A3A6B"/>
-                </a:solidFill>
-              </a:rPr>
-              <a:t>Preprocesamiento con NADIA</a:t>
-            </a:r>
-            <a:endParaRPr lang="en-US" sz="1100" dirty="0"/>
-          </a:p>
-        </p:txBody>
-      </p:sp>
-      <p:sp>
-        <p:nvSpPr>
-          <p:cNvPr id="19" name="text_preprocesamiento_func"/>
-          <p:cNvSpPr txBox="1"/>
-          <p:nvPr/>
-        </p:nvSpPr>
-        <p:spPr>
-          <a:xfrm>
-            <a:off x="502920" y="2670048"/>
-            <a:ext cx="2560320" cy="256032"/>
-          </a:xfrm>
-          <a:prstGeom prst="rect">
-            <a:avLst/>
-          </a:prstGeom>
-          <a:noFill/>
-          <a:ln/>
-        </p:spPr>
-        <p:txBody>
-          <a:bodyPr wrap="square" lIns="0" tIns="0" rIns="0" bIns="0" rtlCol="0" anchor="ctr"/>
-          <a:lstStyle/>
-          <a:p>
-            <a:pPr marL="0" indent="0" algn="ctr">
-              <a:buNone/>
-            </a:pPr>
-            <a:r>
-              <a:rPr lang="en-US" sz="900" i="1" dirty="0">
-                <a:solidFill>
-                  <a:srgbClr val="2A4A8A"/>
-                </a:solidFill>
-              </a:rPr>
-              <a:t>preprocessing_spectronaut()</a:t>
-            </a:r>
-            <a:endParaRPr lang="en-US" sz="900" dirty="0"/>
-          </a:p>
-        </p:txBody>
-      </p:sp>
+            <a:ln w="15240">
+              <a:solidFill>
+                <a:srgbClr val="4A72B8"/>
+              </a:solidFill>
+              <a:prstDash val="solid"/>
+            </a:ln>
+          </p:spPr>
+        </p:sp>
+        <p:sp>
+          <p:nvSpPr>
+            <p:cNvPr id="18" name="text_preprocesamiento"/>
+            <p:cNvSpPr txBox="1"/>
+            <p:nvPr/>
+          </p:nvSpPr>
+          <p:spPr>
+            <a:xfrm>
+              <a:off x="1188720" y="2176272"/>
+              <a:ext cx="2560320" cy="274320"/>
+            </a:xfrm>
+            <a:prstGeom prst="rect">
+              <a:avLst/>
+            </a:prstGeom>
+            <a:noFill/>
+            <a:ln/>
+          </p:spPr>
+          <p:txBody>
+            <a:bodyPr wrap="square" lIns="0" tIns="0" rIns="0" bIns="0" rtlCol="0" anchor="ctr"/>
+            <a:lstStyle/>
+            <a:p>
+              <a:pPr marL="0" indent="0" algn="ctr">
+                <a:buNone/>
+              </a:pPr>
+              <a:r>
+                <a:rPr lang="en-US" sz="1400" b="1" dirty="0">
+                  <a:solidFill>
+                    <a:srgbClr val="1A3A6B"/>
+                  </a:solidFill>
+                </a:rPr>
+                <a:t>Preprocesamiento con NADIA</a:t>
+              </a:r>
+              <a:endParaRPr lang="en-US" sz="1400" dirty="0"/>
+            </a:p>
+          </p:txBody>
+        </p:sp>
+        <p:sp>
+          <p:nvSpPr>
+            <p:cNvPr id="19" name="text_preprocesamiento_func"/>
+            <p:cNvSpPr txBox="1"/>
+            <p:nvPr/>
+          </p:nvSpPr>
+          <p:spPr>
+            <a:xfrm>
+              <a:off x="1188720" y="2450592"/>
+              <a:ext cx="2560320" cy="256032"/>
+            </a:xfrm>
+            <a:prstGeom prst="rect">
+              <a:avLst/>
+            </a:prstGeom>
+            <a:noFill/>
+            <a:ln/>
+          </p:spPr>
+          <p:txBody>
+            <a:bodyPr wrap="square" lIns="0" tIns="0" rIns="0" bIns="0" rtlCol="0" anchor="ctr"/>
+            <a:lstStyle/>
+            <a:p>
+              <a:pPr marL="0" indent="0" algn="ctr">
+                <a:buNone/>
+              </a:pPr>
+              <a:r>
+                <a:rPr lang="en-US" sz="1000" i="1" dirty="0">
+                  <a:solidFill>
+                    <a:srgbClr val="2A4A8A"/>
+                  </a:solidFill>
+                </a:rPr>
+                <a:t>preprocessing_spectronaut()</a:t>
+              </a:r>
+              <a:endParaRPr lang="en-US" sz="1000" dirty="0"/>
+            </a:p>
+          </p:txBody>
+        </p:sp>
+      </p:grpSp>
       <p:sp>
         <p:nvSpPr>
           <p:cNvPr id="20" name="arrow_to_norm"/>
@@ -1240,9 +1332,40 @@
           <p:nvPr/>
         </p:nvSpPr>
         <p:spPr>
+          <a:xfrm flipH="1">
+            <a:off x="2345266" y="2864600"/>
+            <a:ext cx="678502" cy="488167"/>
+          </a:xfrm>
+          <a:prstGeom prst="line">
+            <a:avLst/>
+          </a:prstGeom>
+          <a:noFill/>
+          <a:ln w="19050">
+            <a:solidFill>
+              <a:srgbClr val="1A3A6B"/>
+            </a:solidFill>
+            <a:prstDash val="solid"/>
+            <a:tailEnd type="arrow"/>
+          </a:ln>
+        </p:spPr>
+        <p:txBody>
+          <a:bodyPr/>
+          <a:lstStyle/>
+          <a:p>
+            <a:endParaRPr lang="es-ES" dirty="0"/>
+          </a:p>
+        </p:txBody>
+      </p:sp>
+      <p:sp>
+        <p:nvSpPr>
+          <p:cNvPr id="21" name="arrow_to_imp"/>
+          <p:cNvSpPr/>
+          <p:nvPr/>
+        </p:nvSpPr>
+        <p:spPr>
           <a:xfrm>
-            <a:off x="1051560" y="3017520"/>
-            <a:ext cx="0" cy="320040"/>
+            <a:off x="3023772" y="2864612"/>
+            <a:ext cx="678502" cy="476072"/>
           </a:xfrm>
           <a:prstGeom prst="line">
             <a:avLst/>
@@ -1259,14 +1382,524 @@
       </p:sp>
       <p:sp>
         <p:nvSpPr>
-          <p:cNvPr id="21" name="arrow_to_imp"/>
+          <p:cNvPr id="29" name="text_benchmarking_desc"/>
+          <p:cNvSpPr txBox="1"/>
+          <p:nvPr/>
+        </p:nvSpPr>
+        <p:spPr>
+          <a:xfrm>
+            <a:off x="6297424" y="2587743"/>
+            <a:ext cx="5224016" cy="914400"/>
+          </a:xfrm>
+          <a:prstGeom prst="rect">
+            <a:avLst/>
+          </a:prstGeom>
+          <a:noFill/>
+          <a:ln/>
+        </p:spPr>
+        <p:txBody>
+          <a:bodyPr wrap="square" rtlCol="0" anchor="t"/>
+          <a:lstStyle/>
+          <a:p>
+            <a:pPr marL="0" indent="0" algn="ctr">
+              <a:buNone/>
+            </a:pPr>
+            <a:r>
+              <a:rPr lang="en-US" sz="1600" b="1" dirty="0">
+                <a:solidFill>
+                  <a:srgbClr val="8A2060"/>
+                </a:solidFill>
+              </a:rPr>
+              <a:t>La </a:t>
+            </a:r>
+            <a:r>
+              <a:rPr lang="en-US" sz="1600" b="1" dirty="0" err="1">
+                <a:solidFill>
+                  <a:srgbClr val="8A2060"/>
+                </a:solidFill>
+              </a:rPr>
+              <a:t>función</a:t>
+            </a:r>
+            <a:r>
+              <a:rPr lang="en-US" sz="1600" b="1" dirty="0">
+                <a:solidFill>
+                  <a:srgbClr val="8A2060"/>
+                </a:solidFill>
+              </a:rPr>
+              <a:t> de </a:t>
+            </a:r>
+            <a:r>
+              <a:rPr lang="en-US" sz="1600" b="1" dirty="0" err="1">
+                <a:solidFill>
+                  <a:srgbClr val="8A2060"/>
+                </a:solidFill>
+              </a:rPr>
+              <a:t>análisis</a:t>
+            </a:r>
+            <a:r>
+              <a:rPr lang="en-US" sz="1600" b="1" dirty="0">
+                <a:solidFill>
+                  <a:srgbClr val="8A2060"/>
+                </a:solidFill>
+              </a:rPr>
+              <a:t> </a:t>
+            </a:r>
+            <a:r>
+              <a:rPr lang="en-US" sz="1600" b="1" dirty="0" err="1">
+                <a:solidFill>
+                  <a:srgbClr val="8A2060"/>
+                </a:solidFill>
+              </a:rPr>
+              <a:t>comparativo</a:t>
+            </a:r>
+            <a:r>
+              <a:rPr lang="en-US" sz="1600" b="1" dirty="0">
+                <a:solidFill>
+                  <a:srgbClr val="8A2060"/>
+                </a:solidFill>
+              </a:rPr>
+              <a:t> evalúa la </a:t>
+            </a:r>
+            <a:r>
+              <a:rPr lang="en-US" sz="1600" b="1" dirty="0" err="1">
+                <a:solidFill>
+                  <a:srgbClr val="8A2060"/>
+                </a:solidFill>
+              </a:rPr>
+              <a:t>salida</a:t>
+            </a:r>
+            <a:r>
+              <a:rPr lang="en-US" sz="1600" b="1" dirty="0">
+                <a:solidFill>
+                  <a:srgbClr val="8A2060"/>
+                </a:solidFill>
+              </a:rPr>
+              <a:t> de </a:t>
+            </a:r>
+            <a:r>
+              <a:rPr lang="en-US" sz="1600" b="1" i="1" dirty="0" err="1">
+                <a:solidFill>
+                  <a:srgbClr val="8A2060"/>
+                </a:solidFill>
+              </a:rPr>
+              <a:t>process_proteomics</a:t>
+            </a:r>
+            <a:r>
+              <a:rPr lang="en-US" sz="1600" b="1" i="1" dirty="0">
+                <a:solidFill>
+                  <a:srgbClr val="8A2060"/>
+                </a:solidFill>
+              </a:rPr>
+              <a:t>()</a:t>
+            </a:r>
+            <a:r>
+              <a:rPr lang="en-US" sz="1600" b="1" dirty="0">
+                <a:solidFill>
+                  <a:srgbClr val="8A2060"/>
+                </a:solidFill>
+              </a:rPr>
+              <a:t>. Valida los </a:t>
+            </a:r>
+            <a:r>
+              <a:rPr lang="en-US" sz="1600" b="1" dirty="0" err="1">
+                <a:solidFill>
+                  <a:srgbClr val="8A2060"/>
+                </a:solidFill>
+              </a:rPr>
+              <a:t>métodos</a:t>
+            </a:r>
+            <a:r>
+              <a:rPr lang="en-US" sz="1600" b="1" dirty="0">
+                <a:solidFill>
+                  <a:srgbClr val="8A2060"/>
+                </a:solidFill>
+              </a:rPr>
+              <a:t> de </a:t>
+            </a:r>
+            <a:r>
+              <a:rPr lang="en-US" sz="1600" b="1" dirty="0" err="1">
+                <a:solidFill>
+                  <a:srgbClr val="8A2060"/>
+                </a:solidFill>
+              </a:rPr>
+              <a:t>normalización</a:t>
+            </a:r>
+            <a:r>
+              <a:rPr lang="en-US" sz="1600" b="1" dirty="0">
+                <a:solidFill>
+                  <a:srgbClr val="8A2060"/>
+                </a:solidFill>
+              </a:rPr>
+              <a:t> e imputación MAR y es la </a:t>
+            </a:r>
+            <a:r>
+              <a:rPr lang="en-US" sz="1600" b="1" dirty="0" err="1">
+                <a:solidFill>
+                  <a:srgbClr val="8A2060"/>
+                </a:solidFill>
+              </a:rPr>
+              <a:t>única</a:t>
+            </a:r>
+            <a:r>
+              <a:rPr lang="en-US" sz="1600" b="1" dirty="0">
+                <a:solidFill>
+                  <a:srgbClr val="8A2060"/>
+                </a:solidFill>
+              </a:rPr>
+              <a:t> </a:t>
+            </a:r>
+            <a:r>
+              <a:rPr lang="en-US" sz="1600" b="1" dirty="0" err="1">
+                <a:solidFill>
+                  <a:srgbClr val="8A2060"/>
+                </a:solidFill>
+              </a:rPr>
+              <a:t>opción</a:t>
+            </a:r>
+            <a:r>
+              <a:rPr lang="en-US" sz="1600" b="1" dirty="0">
+                <a:solidFill>
+                  <a:srgbClr val="8A2060"/>
+                </a:solidFill>
+              </a:rPr>
+              <a:t> en NADIA para </a:t>
+            </a:r>
+            <a:r>
+              <a:rPr lang="en-US" sz="1600" b="1" dirty="0" err="1">
+                <a:solidFill>
+                  <a:srgbClr val="8A2060"/>
+                </a:solidFill>
+              </a:rPr>
+              <a:t>evaluar</a:t>
+            </a:r>
+            <a:r>
+              <a:rPr lang="en-US" sz="1600" b="1" dirty="0">
+                <a:solidFill>
+                  <a:srgbClr val="8A2060"/>
+                </a:solidFill>
+              </a:rPr>
+              <a:t> </a:t>
+            </a:r>
+            <a:r>
+              <a:rPr lang="en-US" sz="1600" b="1" dirty="0" err="1">
+                <a:solidFill>
+                  <a:srgbClr val="8A2060"/>
+                </a:solidFill>
+              </a:rPr>
+              <a:t>métodos</a:t>
+            </a:r>
+            <a:r>
+              <a:rPr lang="en-US" sz="1600" b="1" dirty="0">
+                <a:solidFill>
+                  <a:srgbClr val="8A2060"/>
+                </a:solidFill>
+              </a:rPr>
+              <a:t> de imputación MNAR.</a:t>
+            </a:r>
+            <a:endParaRPr lang="en-US" sz="1600" dirty="0"/>
+          </a:p>
+        </p:txBody>
+      </p:sp>
+      <p:grpSp>
+        <p:nvGrpSpPr>
+          <p:cNvPr id="54" name="Group 53">
+            <a:extLst>
+              <a:ext uri="{FF2B5EF4-FFF2-40B4-BE49-F238E27FC236}">
+                <a16:creationId xmlns:a16="http://schemas.microsoft.com/office/drawing/2014/main" id="{97A99F52-6DDF-43A5-94E6-936876A055ED}"/>
+              </a:ext>
+            </a:extLst>
+          </p:cNvPr>
+          <p:cNvGrpSpPr/>
+          <p:nvPr/>
+        </p:nvGrpSpPr>
+        <p:grpSpPr>
+          <a:xfrm>
+            <a:off x="6638926" y="3814868"/>
+            <a:ext cx="3474720" cy="822960"/>
+            <a:chOff x="5120640" y="3383280"/>
+            <a:chExt cx="3474720" cy="822960"/>
+          </a:xfrm>
+        </p:grpSpPr>
+        <p:sp>
+          <p:nvSpPr>
+            <p:cNvPr id="30" name="box_benchmarking"/>
+            <p:cNvSpPr/>
+            <p:nvPr/>
+          </p:nvSpPr>
+          <p:spPr>
+            <a:xfrm>
+              <a:off x="5120640" y="3383280"/>
+              <a:ext cx="3474720" cy="822960"/>
+            </a:xfrm>
+            <a:prstGeom prst="roundRect">
+              <a:avLst>
+                <a:gd name="adj" fmla="val 8889"/>
+              </a:avLst>
+            </a:prstGeom>
+            <a:solidFill>
+              <a:srgbClr val="F7D8E8"/>
+            </a:solidFill>
+            <a:ln w="28575">
+              <a:solidFill>
+                <a:srgbClr val="8A2060"/>
+              </a:solidFill>
+              <a:prstDash val="dash"/>
+            </a:ln>
+          </p:spPr>
+        </p:sp>
+        <p:sp>
+          <p:nvSpPr>
+            <p:cNvPr id="31" name="text_spikein_label"/>
+            <p:cNvSpPr txBox="1"/>
+            <p:nvPr/>
+          </p:nvSpPr>
+          <p:spPr>
+            <a:xfrm>
+              <a:off x="5166360" y="3401568"/>
+              <a:ext cx="3383280" cy="201168"/>
+            </a:xfrm>
+            <a:prstGeom prst="rect">
+              <a:avLst/>
+            </a:prstGeom>
+            <a:noFill/>
+            <a:ln/>
+          </p:spPr>
+          <p:txBody>
+            <a:bodyPr wrap="square" lIns="0" tIns="0" rIns="0" bIns="0" rtlCol="0" anchor="ctr"/>
+            <a:lstStyle/>
+            <a:p>
+              <a:pPr marL="0" indent="0" algn="l">
+                <a:buNone/>
+              </a:pPr>
+              <a:r>
+                <a:rPr lang="en-US" sz="900" i="1" dirty="0">
+                  <a:solidFill>
+                    <a:srgbClr val="8A2A5A"/>
+                  </a:solidFill>
+                </a:rPr>
+                <a:t>Cuando hay proteínas spike-in disponibles</a:t>
+              </a:r>
+              <a:endParaRPr lang="en-US" sz="900" dirty="0"/>
+            </a:p>
+          </p:txBody>
+        </p:sp>
+        <p:sp>
+          <p:nvSpPr>
+            <p:cNvPr id="32" name="text_benchmarking_title"/>
+            <p:cNvSpPr txBox="1"/>
+            <p:nvPr/>
+          </p:nvSpPr>
+          <p:spPr>
+            <a:xfrm>
+              <a:off x="5120640" y="3602736"/>
+              <a:ext cx="3474720" cy="256032"/>
+            </a:xfrm>
+            <a:prstGeom prst="rect">
+              <a:avLst/>
+            </a:prstGeom>
+            <a:noFill/>
+            <a:ln/>
+          </p:spPr>
+          <p:txBody>
+            <a:bodyPr wrap="square" lIns="0" tIns="0" rIns="0" bIns="0" rtlCol="0" anchor="ctr"/>
+            <a:lstStyle/>
+            <a:p>
+              <a:pPr marL="0" indent="0" algn="ctr">
+                <a:buNone/>
+              </a:pPr>
+              <a:r>
+                <a:rPr lang="en-US" sz="1400" b="1" dirty="0">
+                  <a:solidFill>
+                    <a:srgbClr val="8A2060"/>
+                  </a:solidFill>
+                </a:rPr>
+                <a:t>Benchmarking con proteínas spike-in</a:t>
+              </a:r>
+              <a:endParaRPr lang="en-US" sz="1400" dirty="0"/>
+            </a:p>
+          </p:txBody>
+        </p:sp>
+        <p:sp>
+          <p:nvSpPr>
+            <p:cNvPr id="33" name="text_benchmarking_func"/>
+            <p:cNvSpPr txBox="1"/>
+            <p:nvPr/>
+          </p:nvSpPr>
+          <p:spPr>
+            <a:xfrm>
+              <a:off x="5120640" y="3858768"/>
+              <a:ext cx="3474720" cy="292608"/>
+            </a:xfrm>
+            <a:prstGeom prst="rect">
+              <a:avLst/>
+            </a:prstGeom>
+            <a:noFill/>
+            <a:ln/>
+          </p:spPr>
+          <p:txBody>
+            <a:bodyPr wrap="square" lIns="0" tIns="0" rIns="0" bIns="0" rtlCol="0" anchor="ctr"/>
+            <a:lstStyle/>
+            <a:p>
+              <a:pPr marL="0" indent="0" algn="ctr">
+                <a:buNone/>
+              </a:pPr>
+              <a:r>
+                <a:rPr lang="en-US" sz="1000" i="1" dirty="0">
+                  <a:solidFill>
+                    <a:srgbClr val="8A2A5A"/>
+                  </a:solidFill>
+                </a:rPr>
+                <a:t>benchmarking_proteomics()</a:t>
+              </a:r>
+              <a:endParaRPr lang="en-US" sz="1000" dirty="0"/>
+            </a:p>
+            <a:p>
+              <a:pPr marL="0" indent="0" algn="ctr">
+                <a:buNone/>
+              </a:pPr>
+              <a:r>
+                <a:rPr lang="en-US" sz="1000" i="1" dirty="0">
+                  <a:solidFill>
+                    <a:srgbClr val="8A2A5A"/>
+                  </a:solidFill>
+                </a:rPr>
+                <a:t>benchmarking_multiple()</a:t>
+              </a:r>
+              <a:endParaRPr lang="en-US" sz="1000" dirty="0"/>
+            </a:p>
+          </p:txBody>
+        </p:sp>
+      </p:grpSp>
+      <p:grpSp>
+        <p:nvGrpSpPr>
+          <p:cNvPr id="53" name="Group 52">
+            <a:extLst>
+              <a:ext uri="{FF2B5EF4-FFF2-40B4-BE49-F238E27FC236}">
+                <a16:creationId xmlns:a16="http://schemas.microsoft.com/office/drawing/2014/main" id="{5BFA6531-D3E8-4516-870B-E8FBC0B457B0}"/>
+              </a:ext>
+            </a:extLst>
+          </p:cNvPr>
+          <p:cNvGrpSpPr/>
+          <p:nvPr/>
+        </p:nvGrpSpPr>
+        <p:grpSpPr>
+          <a:xfrm>
+            <a:off x="1265428" y="5462354"/>
+            <a:ext cx="3520425" cy="685800"/>
+            <a:chOff x="502919" y="4800600"/>
+            <a:chExt cx="3520425" cy="685800"/>
+          </a:xfrm>
+        </p:grpSpPr>
+        <p:sp>
+          <p:nvSpPr>
+            <p:cNvPr id="35" name="box_proteinas"/>
+            <p:cNvSpPr/>
+            <p:nvPr/>
+          </p:nvSpPr>
+          <p:spPr>
+            <a:xfrm>
+              <a:off x="502919" y="4800600"/>
+              <a:ext cx="3520425" cy="685800"/>
+            </a:xfrm>
+            <a:prstGeom prst="roundRect">
+              <a:avLst>
+                <a:gd name="adj" fmla="val 10667"/>
+              </a:avLst>
+            </a:prstGeom>
+            <a:solidFill>
+              <a:srgbClr val="D0DAF0"/>
+            </a:solidFill>
+            <a:ln w="19050">
+              <a:solidFill>
+                <a:srgbClr val="4A72B8"/>
+              </a:solidFill>
+              <a:prstDash val="solid"/>
+            </a:ln>
+          </p:spPr>
+        </p:sp>
+        <p:sp>
+          <p:nvSpPr>
+            <p:cNvPr id="36" name="text_proteinas"/>
+            <p:cNvSpPr txBox="1"/>
+            <p:nvPr/>
+          </p:nvSpPr>
+          <p:spPr>
+            <a:xfrm>
+              <a:off x="617211" y="4835822"/>
+              <a:ext cx="3291840" cy="320040"/>
+            </a:xfrm>
+            <a:prstGeom prst="rect">
+              <a:avLst/>
+            </a:prstGeom>
+            <a:noFill/>
+            <a:ln/>
+          </p:spPr>
+          <p:txBody>
+            <a:bodyPr wrap="square" lIns="0" tIns="0" rIns="0" bIns="0" rtlCol="0" anchor="ctr"/>
+            <a:lstStyle/>
+            <a:p>
+              <a:pPr marL="0" indent="0" algn="ctr">
+                <a:buNone/>
+              </a:pPr>
+              <a:r>
+                <a:rPr lang="en-US" sz="1600" b="1" dirty="0">
+                  <a:solidFill>
+                    <a:srgbClr val="1A3A6B"/>
+                  </a:solidFill>
+                </a:rPr>
+                <a:t>Proteínas expresadas diferencialmente</a:t>
+              </a:r>
+              <a:endParaRPr lang="en-US" sz="1600" dirty="0"/>
+            </a:p>
+          </p:txBody>
+        </p:sp>
+        <p:sp>
+          <p:nvSpPr>
+            <p:cNvPr id="37" name="text_proteinas_func"/>
+            <p:cNvSpPr txBox="1"/>
+            <p:nvPr/>
+          </p:nvSpPr>
+          <p:spPr>
+            <a:xfrm>
+              <a:off x="617211" y="5155862"/>
+              <a:ext cx="3291840" cy="256032"/>
+            </a:xfrm>
+            <a:prstGeom prst="rect">
+              <a:avLst/>
+            </a:prstGeom>
+            <a:noFill/>
+            <a:ln/>
+          </p:spPr>
+          <p:txBody>
+            <a:bodyPr wrap="square" lIns="0" tIns="0" rIns="0" bIns="0" rtlCol="0" anchor="ctr"/>
+            <a:lstStyle/>
+            <a:p>
+              <a:pPr marL="0" indent="0" algn="ctr">
+                <a:buNone/>
+              </a:pPr>
+              <a:r>
+                <a:rPr lang="en-US" sz="1000" i="1" dirty="0">
+                  <a:solidFill>
+                    <a:srgbClr val="2A4A8A"/>
+                  </a:solidFill>
+                </a:rPr>
+                <a:t>process_proteomics()</a:t>
+              </a:r>
+              <a:endParaRPr lang="en-US" sz="1000" dirty="0"/>
+            </a:p>
+          </p:txBody>
+        </p:sp>
+      </p:grpSp>
+      <p:sp>
+        <p:nvSpPr>
+          <p:cNvPr id="38" name="arrow_norm_to_prot"/>
           <p:cNvSpPr/>
           <p:nvPr/>
         </p:nvSpPr>
         <p:spPr>
           <a:xfrm>
-            <a:off x="1965960" y="3017520"/>
-            <a:ext cx="0" cy="320040"/>
+            <a:off x="2345266" y="4342650"/>
+            <a:ext cx="678504" cy="1119692"/>
           </a:xfrm>
           <a:prstGeom prst="line">
             <a:avLst/>
@@ -1283,743 +1916,14 @@
       </p:sp>
       <p:sp>
         <p:nvSpPr>
-          <p:cNvPr id="22" name="box_norm"/>
-          <p:cNvSpPr/>
-          <p:nvPr/>
-        </p:nvSpPr>
-        <p:spPr>
-          <a:xfrm>
-            <a:off x="256032" y="3337560"/>
-            <a:ext cx="2103120" cy="822960"/>
-          </a:xfrm>
-          <a:prstGeom prst="roundRect">
-            <a:avLst>
-              <a:gd name="adj" fmla="val 8889"/>
-            </a:avLst>
-          </a:prstGeom>
-          <a:solidFill>
-            <a:srgbClr val="D0DAF0"/>
-          </a:solidFill>
-          <a:ln w="15240">
-            <a:solidFill>
-              <a:srgbClr val="4A72B8"/>
-            </a:solidFill>
-            <a:prstDash val="solid"/>
-          </a:ln>
-        </p:spPr>
-      </p:sp>
-      <p:sp>
-        <p:nvSpPr>
-          <p:cNvPr id="23" name="text_norm"/>
-          <p:cNvSpPr txBox="1"/>
-          <p:nvPr/>
-        </p:nvSpPr>
-        <p:spPr>
-          <a:xfrm>
-            <a:off x="256032" y="3355848"/>
-            <a:ext cx="2103120" cy="457200"/>
-          </a:xfrm>
-          <a:prstGeom prst="rect">
-            <a:avLst/>
-          </a:prstGeom>
-          <a:noFill/>
-          <a:ln/>
-        </p:spPr>
-        <p:txBody>
-          <a:bodyPr wrap="square" lIns="0" tIns="0" rIns="0" bIns="0" rtlCol="0" anchor="ctr"/>
-          <a:lstStyle/>
-          <a:p>
-            <a:pPr marL="0" indent="0" algn="ctr">
-              <a:buNone/>
-            </a:pPr>
-            <a:r>
-              <a:rPr lang="en-US" sz="1100" b="1" dirty="0">
-                <a:solidFill>
-                  <a:srgbClr val="1A3A6B"/>
-                </a:solidFill>
-              </a:rPr>
-              <a:t>Análisis de métricas</a:t>
-            </a:r>
-            <a:endParaRPr lang="en-US" sz="1100" dirty="0"/>
-          </a:p>
-          <a:p>
-            <a:pPr marL="0" indent="0" algn="ctr">
-              <a:buNone/>
-            </a:pPr>
-            <a:r>
-              <a:rPr lang="en-US" sz="1100" b="1" dirty="0">
-                <a:solidFill>
-                  <a:srgbClr val="1A3A6B"/>
-                </a:solidFill>
-              </a:rPr>
-              <a:t>de normalización</a:t>
-            </a:r>
-            <a:endParaRPr lang="en-US" sz="1100" dirty="0"/>
-          </a:p>
-        </p:txBody>
-      </p:sp>
-      <p:sp>
-        <p:nvSpPr>
-          <p:cNvPr id="24" name="text_norm_func"/>
-          <p:cNvSpPr txBox="1"/>
-          <p:nvPr/>
-        </p:nvSpPr>
-        <p:spPr>
-          <a:xfrm>
-            <a:off x="256032" y="3813048"/>
-            <a:ext cx="2103120" cy="320040"/>
-          </a:xfrm>
-          <a:prstGeom prst="rect">
-            <a:avLst/>
-          </a:prstGeom>
-          <a:noFill/>
-          <a:ln/>
-        </p:spPr>
-        <p:txBody>
-          <a:bodyPr wrap="square" lIns="0" tIns="0" rIns="0" bIns="0" rtlCol="0" anchor="ctr"/>
-          <a:lstStyle/>
-          <a:p>
-            <a:pPr marL="0" indent="0" algn="ctr">
-              <a:buNone/>
-            </a:pPr>
-            <a:r>
-              <a:rPr lang="en-US" sz="850" i="1" dirty="0">
-                <a:solidFill>
-                  <a:srgbClr val="2A4A8A"/>
-                </a:solidFill>
-              </a:rPr>
-              <a:t>nm_prepare_se()</a:t>
-            </a:r>
-            <a:endParaRPr lang="en-US" sz="850" dirty="0"/>
-          </a:p>
-          <a:p>
-            <a:pPr marL="0" indent="0" algn="ctr">
-              <a:buNone/>
-            </a:pPr>
-            <a:r>
-              <a:rPr lang="en-US" sz="850" i="1" dirty="0">
-                <a:solidFill>
-                  <a:srgbClr val="2A4A8A"/>
-                </a:solidFill>
-              </a:rPr>
-              <a:t>normalization_metrics()</a:t>
-            </a:r>
-            <a:endParaRPr lang="en-US" sz="850" dirty="0"/>
-          </a:p>
-        </p:txBody>
-      </p:sp>
-      <p:sp>
-        <p:nvSpPr>
-          <p:cNvPr id="25" name="box_imp"/>
-          <p:cNvSpPr/>
-          <p:nvPr/>
-        </p:nvSpPr>
-        <p:spPr>
-          <a:xfrm>
-            <a:off x="2468880" y="3337560"/>
-            <a:ext cx="2286000" cy="960120"/>
-          </a:xfrm>
-          <a:prstGeom prst="roundRect">
-            <a:avLst>
-              <a:gd name="adj" fmla="val 7619"/>
-            </a:avLst>
-          </a:prstGeom>
-          <a:solidFill>
-            <a:srgbClr val="D0DAF0"/>
-          </a:solidFill>
-          <a:ln w="15240">
-            <a:solidFill>
-              <a:srgbClr val="4A72B8"/>
-            </a:solidFill>
-            <a:prstDash val="solid"/>
-          </a:ln>
-        </p:spPr>
-      </p:sp>
-      <p:sp>
-        <p:nvSpPr>
-          <p:cNvPr id="26" name="text_imp"/>
-          <p:cNvSpPr txBox="1"/>
-          <p:nvPr/>
-        </p:nvSpPr>
-        <p:spPr>
-          <a:xfrm>
-            <a:off x="2468880" y="3355848"/>
-            <a:ext cx="2286000" cy="365760"/>
-          </a:xfrm>
-          <a:prstGeom prst="rect">
-            <a:avLst/>
-          </a:prstGeom>
-          <a:noFill/>
-          <a:ln/>
-        </p:spPr>
-        <p:txBody>
-          <a:bodyPr wrap="square" lIns="0" tIns="0" rIns="0" bIns="0" rtlCol="0" anchor="ctr"/>
-          <a:lstStyle/>
-          <a:p>
-            <a:pPr marL="0" indent="0" algn="ctr">
-              <a:buNone/>
-            </a:pPr>
-            <a:r>
-              <a:rPr lang="en-US" sz="1100" b="1" dirty="0">
-                <a:solidFill>
-                  <a:srgbClr val="1A3A6B"/>
-                </a:solidFill>
-              </a:rPr>
-              <a:t>Análisis de métricas</a:t>
-            </a:r>
-            <a:endParaRPr lang="en-US" sz="1100" dirty="0"/>
-          </a:p>
-          <a:p>
-            <a:pPr marL="0" indent="0" algn="ctr">
-              <a:buNone/>
-            </a:pPr>
-            <a:r>
-              <a:rPr lang="en-US" sz="1100" b="1" dirty="0">
-                <a:solidFill>
-                  <a:srgbClr val="1A3A6B"/>
-                </a:solidFill>
-              </a:rPr>
-              <a:t>de imputación</a:t>
-            </a:r>
-            <a:endParaRPr lang="en-US" sz="1100" dirty="0"/>
-          </a:p>
-        </p:txBody>
-      </p:sp>
-      <p:sp>
-        <p:nvSpPr>
-          <p:cNvPr id="27" name="text_imp_sub"/>
-          <p:cNvSpPr txBox="1"/>
-          <p:nvPr/>
-        </p:nvSpPr>
-        <p:spPr>
-          <a:xfrm>
-            <a:off x="2468880" y="3721608"/>
-            <a:ext cx="2286000" cy="201168"/>
-          </a:xfrm>
-          <a:prstGeom prst="rect">
-            <a:avLst/>
-          </a:prstGeom>
-          <a:noFill/>
-          <a:ln/>
-        </p:spPr>
-        <p:txBody>
-          <a:bodyPr wrap="square" lIns="0" tIns="0" rIns="0" bIns="0" rtlCol="0" anchor="ctr"/>
-          <a:lstStyle/>
-          <a:p>
-            <a:pPr marL="0" indent="0" algn="ctr">
-              <a:buNone/>
-            </a:pPr>
-            <a:r>
-              <a:rPr lang="en-US" sz="900" dirty="0">
-                <a:solidFill>
-                  <a:srgbClr val="1A3A6B"/>
-                </a:solidFill>
-              </a:rPr>
-              <a:t>(para NAs MAR)</a:t>
-            </a:r>
-            <a:endParaRPr lang="en-US" sz="900" dirty="0"/>
-          </a:p>
-        </p:txBody>
-      </p:sp>
-      <p:sp>
-        <p:nvSpPr>
-          <p:cNvPr id="28" name="text_imp_func"/>
-          <p:cNvSpPr txBox="1"/>
-          <p:nvPr/>
-        </p:nvSpPr>
-        <p:spPr>
-          <a:xfrm>
-            <a:off x="2468880" y="3922776"/>
-            <a:ext cx="2286000" cy="320040"/>
-          </a:xfrm>
-          <a:prstGeom prst="rect">
-            <a:avLst/>
-          </a:prstGeom>
-          <a:noFill/>
-          <a:ln/>
-        </p:spPr>
-        <p:txBody>
-          <a:bodyPr wrap="square" lIns="0" tIns="0" rIns="0" bIns="0" rtlCol="0" anchor="ctr"/>
-          <a:lstStyle/>
-          <a:p>
-            <a:pPr marL="0" indent="0" algn="ctr">
-              <a:buNone/>
-            </a:pPr>
-            <a:r>
-              <a:rPr lang="en-US" sz="850" i="1" dirty="0">
-                <a:solidFill>
-                  <a:srgbClr val="2A4A8A"/>
-                </a:solidFill>
-              </a:rPr>
-              <a:t>im_prepare_se()</a:t>
-            </a:r>
-            <a:endParaRPr lang="en-US" sz="850" dirty="0"/>
-          </a:p>
-          <a:p>
-            <a:pPr marL="0" indent="0" algn="ctr">
-              <a:buNone/>
-            </a:pPr>
-            <a:r>
-              <a:rPr lang="en-US" sz="850" i="1" dirty="0">
-                <a:solidFill>
-                  <a:srgbClr val="2A4A8A"/>
-                </a:solidFill>
-              </a:rPr>
-              <a:t>imputation_metrics()</a:t>
-            </a:r>
-            <a:endParaRPr lang="en-US" sz="850" dirty="0"/>
-          </a:p>
-        </p:txBody>
-      </p:sp>
-      <p:sp>
-        <p:nvSpPr>
-          <p:cNvPr id="29" name="text_benchmarking_desc"/>
-          <p:cNvSpPr txBox="1"/>
-          <p:nvPr/>
-        </p:nvSpPr>
-        <p:spPr>
-          <a:xfrm>
-            <a:off x="5120640" y="2377440"/>
-            <a:ext cx="3474720" cy="914400"/>
-          </a:xfrm>
-          <a:prstGeom prst="rect">
-            <a:avLst/>
-          </a:prstGeom>
-          <a:noFill/>
-          <a:ln/>
-        </p:spPr>
-        <p:txBody>
-          <a:bodyPr wrap="square" rtlCol="0" anchor="t"/>
-          <a:lstStyle/>
-          <a:p>
-            <a:pPr marL="0" indent="0" algn="ctr">
-              <a:buNone/>
-            </a:pPr>
-            <a:r>
-              <a:rPr lang="en-US" sz="1000" b="1" dirty="0">
-                <a:solidFill>
-                  <a:srgbClr val="8A2060"/>
-                </a:solidFill>
-              </a:rPr>
-              <a:t>El benchmarking evalúa la salida de
-</a:t>
-            </a:r>
-            <a:r>
-              <a:rPr lang="en-US" sz="1000" b="1" i="1" dirty="0">
-                <a:solidFill>
-                  <a:srgbClr val="8A2060"/>
-                </a:solidFill>
-              </a:rPr>
-              <a:t>process_proteomics()</a:t>
-            </a:r>
-            <a:r>
-              <a:rPr lang="en-US" sz="1000" b="1" dirty="0">
-                <a:solidFill>
-                  <a:srgbClr val="8A2060"/>
-                </a:solidFill>
-              </a:rPr>
-              <a:t>. Valida los métodos de</a:t>
-            </a:r>
-            <a:endParaRPr lang="en-US" sz="1000" dirty="0"/>
-          </a:p>
-          <a:p>
-            <a:pPr marL="0" indent="0" algn="ctr">
-              <a:buNone/>
-            </a:pPr>
-            <a:r>
-              <a:rPr lang="en-US" sz="1000" b="1" dirty="0">
-                <a:solidFill>
-                  <a:srgbClr val="8A2060"/>
-                </a:solidFill>
-              </a:rPr>
-              <a:t>normalización e imputación MAR y es</a:t>
-            </a:r>
-            <a:endParaRPr lang="en-US" sz="1000" dirty="0"/>
-          </a:p>
-          <a:p>
-            <a:pPr marL="0" indent="0" algn="ctr">
-              <a:buNone/>
-            </a:pPr>
-            <a:r>
-              <a:rPr lang="en-US" sz="1000" b="1" dirty="0">
-                <a:solidFill>
-                  <a:srgbClr val="8A2060"/>
-                </a:solidFill>
-              </a:rPr>
-              <a:t>la única opción en NADIA para evaluar</a:t>
-            </a:r>
-            <a:endParaRPr lang="en-US" sz="1000" dirty="0"/>
-          </a:p>
-          <a:p>
-            <a:pPr marL="0" indent="0" algn="ctr">
-              <a:buNone/>
-            </a:pPr>
-            <a:r>
-              <a:rPr lang="en-US" sz="1000" b="1" dirty="0">
-                <a:solidFill>
-                  <a:srgbClr val="8A2060"/>
-                </a:solidFill>
-              </a:rPr>
-              <a:t>métodos de imputación MNAR.</a:t>
-            </a:r>
-            <a:endParaRPr lang="en-US" sz="1000" dirty="0"/>
-          </a:p>
-        </p:txBody>
-      </p:sp>
-      <p:sp>
-        <p:nvSpPr>
-          <p:cNvPr id="30" name="box_benchmarking"/>
-          <p:cNvSpPr/>
-          <p:nvPr/>
-        </p:nvSpPr>
-        <p:spPr>
-          <a:xfrm>
-            <a:off x="5120640" y="3383280"/>
-            <a:ext cx="3474720" cy="822960"/>
-          </a:xfrm>
-          <a:prstGeom prst="roundRect">
-            <a:avLst>
-              <a:gd name="adj" fmla="val 8889"/>
-            </a:avLst>
-          </a:prstGeom>
-          <a:solidFill>
-            <a:srgbClr val="F7D8E8"/>
-          </a:solidFill>
-          <a:ln w="19050">
-            <a:solidFill>
-              <a:srgbClr val="C0508A"/>
-            </a:solidFill>
-            <a:prstDash val="dash"/>
-          </a:ln>
-        </p:spPr>
-      </p:sp>
-      <p:sp>
-        <p:nvSpPr>
-          <p:cNvPr id="31" name="text_spikein_label"/>
-          <p:cNvSpPr txBox="1"/>
-          <p:nvPr/>
-        </p:nvSpPr>
-        <p:spPr>
-          <a:xfrm>
-            <a:off x="5166360" y="3401568"/>
-            <a:ext cx="3383280" cy="201168"/>
-          </a:xfrm>
-          <a:prstGeom prst="rect">
-            <a:avLst/>
-          </a:prstGeom>
-          <a:noFill/>
-          <a:ln/>
-        </p:spPr>
-        <p:txBody>
-          <a:bodyPr wrap="square" lIns="0" tIns="0" rIns="0" bIns="0" rtlCol="0" anchor="ctr"/>
-          <a:lstStyle/>
-          <a:p>
-            <a:pPr marL="0" indent="0" algn="l">
-              <a:buNone/>
-            </a:pPr>
-            <a:r>
-              <a:rPr lang="en-US" sz="850" i="1" dirty="0">
-                <a:solidFill>
-                  <a:srgbClr val="8A2A5A"/>
-                </a:solidFill>
-              </a:rPr>
-              <a:t>Cuando hay proteínas spike-in disponibles</a:t>
-            </a:r>
-            <a:endParaRPr lang="en-US" sz="850" dirty="0"/>
-          </a:p>
-        </p:txBody>
-      </p:sp>
-      <p:sp>
-        <p:nvSpPr>
-          <p:cNvPr id="32" name="text_benchmarking_title"/>
-          <p:cNvSpPr txBox="1"/>
-          <p:nvPr/>
-        </p:nvSpPr>
-        <p:spPr>
-          <a:xfrm>
-            <a:off x="5120640" y="3602736"/>
-            <a:ext cx="3474720" cy="256032"/>
-          </a:xfrm>
-          <a:prstGeom prst="rect">
-            <a:avLst/>
-          </a:prstGeom>
-          <a:noFill/>
-          <a:ln/>
-        </p:spPr>
-        <p:txBody>
-          <a:bodyPr wrap="square" lIns="0" tIns="0" rIns="0" bIns="0" rtlCol="0" anchor="ctr"/>
-          <a:lstStyle/>
-          <a:p>
-            <a:pPr marL="0" indent="0" algn="ctr">
-              <a:buNone/>
-            </a:pPr>
-            <a:r>
-              <a:rPr lang="en-US" sz="1100" b="1" dirty="0">
-                <a:solidFill>
-                  <a:srgbClr val="8A2060"/>
-                </a:solidFill>
-              </a:rPr>
-              <a:t>Benchmarking con proteínas spike-in</a:t>
-            </a:r>
-            <a:endParaRPr lang="en-US" sz="1100" dirty="0"/>
-          </a:p>
-        </p:txBody>
-      </p:sp>
-      <p:sp>
-        <p:nvSpPr>
-          <p:cNvPr id="33" name="text_benchmarking_func"/>
-          <p:cNvSpPr txBox="1"/>
-          <p:nvPr/>
-        </p:nvSpPr>
-        <p:spPr>
-          <a:xfrm>
-            <a:off x="5120640" y="3858768"/>
-            <a:ext cx="3474720" cy="292608"/>
-          </a:xfrm>
-          <a:prstGeom prst="rect">
-            <a:avLst/>
-          </a:prstGeom>
-          <a:noFill/>
-          <a:ln/>
-        </p:spPr>
-        <p:txBody>
-          <a:bodyPr wrap="square" lIns="0" tIns="0" rIns="0" bIns="0" rtlCol="0" anchor="ctr"/>
-          <a:lstStyle/>
-          <a:p>
-            <a:pPr marL="0" indent="0" algn="ctr">
-              <a:buNone/>
-            </a:pPr>
-            <a:r>
-              <a:rPr lang="en-US" sz="850" i="1" dirty="0">
-                <a:solidFill>
-                  <a:srgbClr val="8A2A5A"/>
-                </a:solidFill>
-              </a:rPr>
-              <a:t>benchmarking_proteomics()</a:t>
-            </a:r>
-            <a:endParaRPr lang="en-US" sz="850" dirty="0"/>
-          </a:p>
-          <a:p>
-            <a:pPr marL="0" indent="0" algn="ctr">
-              <a:buNone/>
-            </a:pPr>
-            <a:r>
-              <a:rPr lang="en-US" sz="850" i="1" dirty="0">
-                <a:solidFill>
-                  <a:srgbClr val="8A2A5A"/>
-                </a:solidFill>
-              </a:rPr>
-              <a:t>benchmarking_multiple()</a:t>
-            </a:r>
-            <a:endParaRPr lang="en-US" sz="850" dirty="0"/>
-          </a:p>
-        </p:txBody>
-      </p:sp>
-      <p:sp>
-        <p:nvSpPr>
-          <p:cNvPr id="34" name="arrow_imp_to_bench"/>
-          <p:cNvSpPr/>
-          <p:nvPr/>
-        </p:nvSpPr>
-        <p:spPr>
-          <a:xfrm>
-            <a:off x="4754880" y="3767328"/>
-            <a:ext cx="365760" cy="0"/>
-          </a:xfrm>
-          <a:prstGeom prst="line">
-            <a:avLst/>
-          </a:prstGeom>
-          <a:noFill/>
-          <a:ln w="19050">
-            <a:solidFill>
-              <a:srgbClr val="C0508A"/>
-            </a:solidFill>
-            <a:prstDash val="dash"/>
-            <a:tailEnd type="arrow"/>
-          </a:ln>
-        </p:spPr>
-      </p:sp>
-      <p:sp>
-        <p:nvSpPr>
-          <p:cNvPr id="35" name="box_proteinas"/>
-          <p:cNvSpPr/>
-          <p:nvPr/>
-        </p:nvSpPr>
-        <p:spPr>
-          <a:xfrm>
-            <a:off x="502920" y="4800600"/>
-            <a:ext cx="3291840" cy="685800"/>
-          </a:xfrm>
-          <a:prstGeom prst="roundRect">
-            <a:avLst>
-              <a:gd name="adj" fmla="val 10667"/>
-            </a:avLst>
-          </a:prstGeom>
-          <a:solidFill>
-            <a:srgbClr val="D0DAF0"/>
-          </a:solidFill>
-          <a:ln w="19050">
-            <a:solidFill>
-              <a:srgbClr val="4A72B8"/>
-            </a:solidFill>
-            <a:prstDash val="solid"/>
-          </a:ln>
-        </p:spPr>
-      </p:sp>
-      <p:sp>
-        <p:nvSpPr>
-          <p:cNvPr id="36" name="text_proteinas"/>
-          <p:cNvSpPr txBox="1"/>
-          <p:nvPr/>
-        </p:nvSpPr>
-        <p:spPr>
-          <a:xfrm>
-            <a:off x="502920" y="4818888"/>
-            <a:ext cx="3291840" cy="320040"/>
-          </a:xfrm>
-          <a:prstGeom prst="rect">
-            <a:avLst/>
-          </a:prstGeom>
-          <a:noFill/>
-          <a:ln/>
-        </p:spPr>
-        <p:txBody>
-          <a:bodyPr wrap="square" lIns="0" tIns="0" rIns="0" bIns="0" rtlCol="0" anchor="ctr"/>
-          <a:lstStyle/>
-          <a:p>
-            <a:pPr marL="0" indent="0" algn="ctr">
-              <a:buNone/>
-            </a:pPr>
-            <a:r>
-              <a:rPr lang="en-US" sz="1200" b="1" dirty="0">
-                <a:solidFill>
-                  <a:srgbClr val="1A3A6B"/>
-                </a:solidFill>
-              </a:rPr>
-              <a:t>Proteínas expresadas diferencialmente</a:t>
-            </a:r>
-            <a:endParaRPr lang="en-US" sz="1200" dirty="0"/>
-          </a:p>
-        </p:txBody>
-      </p:sp>
-      <p:sp>
-        <p:nvSpPr>
-          <p:cNvPr id="37" name="text_proteinas_func"/>
-          <p:cNvSpPr txBox="1"/>
-          <p:nvPr/>
-        </p:nvSpPr>
-        <p:spPr>
-          <a:xfrm>
-            <a:off x="502920" y="5138928"/>
-            <a:ext cx="3291840" cy="256032"/>
-          </a:xfrm>
-          <a:prstGeom prst="rect">
-            <a:avLst/>
-          </a:prstGeom>
-          <a:noFill/>
-          <a:ln/>
-        </p:spPr>
-        <p:txBody>
-          <a:bodyPr wrap="square" lIns="0" tIns="0" rIns="0" bIns="0" rtlCol="0" anchor="ctr"/>
-          <a:lstStyle/>
-          <a:p>
-            <a:pPr marL="0" indent="0" algn="ctr">
-              <a:buNone/>
-            </a:pPr>
-            <a:r>
-              <a:rPr lang="en-US" sz="950" i="1" dirty="0">
-                <a:solidFill>
-                  <a:srgbClr val="2A4A8A"/>
-                </a:solidFill>
-              </a:rPr>
-              <a:t>process_proteomics()</a:t>
-            </a:r>
-            <a:endParaRPr lang="en-US" sz="950" dirty="0"/>
-          </a:p>
-        </p:txBody>
-      </p:sp>
-      <p:sp>
-        <p:nvSpPr>
-          <p:cNvPr id="38" name="arrow_norm_to_prot"/>
-          <p:cNvSpPr/>
-          <p:nvPr/>
-        </p:nvSpPr>
-        <p:spPr>
-          <a:xfrm>
-            <a:off x="1005840" y="4160520"/>
-            <a:ext cx="0" cy="640080"/>
-          </a:xfrm>
-          <a:prstGeom prst="line">
-            <a:avLst/>
-          </a:prstGeom>
-          <a:noFill/>
-          <a:ln w="19050">
-            <a:solidFill>
-              <a:srgbClr val="1A3A6B"/>
-            </a:solidFill>
-            <a:prstDash val="solid"/>
-            <a:tailEnd type="arrow"/>
-          </a:ln>
-        </p:spPr>
-      </p:sp>
-      <p:sp>
-        <p:nvSpPr>
-          <p:cNvPr id="39" name="arrow_prot_to_bench"/>
-          <p:cNvSpPr/>
-          <p:nvPr/>
-        </p:nvSpPr>
-        <p:spPr>
-          <a:xfrm>
-            <a:off x="3794760" y="5138928"/>
-            <a:ext cx="1325880" cy="0"/>
-          </a:xfrm>
-          <a:prstGeom prst="line">
-            <a:avLst/>
-          </a:prstGeom>
-          <a:noFill/>
-          <a:ln w="19050">
-            <a:solidFill>
-              <a:srgbClr val="C0508A"/>
-            </a:solidFill>
-            <a:prstDash val="dash"/>
-            <a:tailEnd type="arrow"/>
-          </a:ln>
-        </p:spPr>
-      </p:sp>
-      <p:sp>
-        <p:nvSpPr>
-          <p:cNvPr id="40" name="arrow_bench_to_prot"/>
-          <p:cNvSpPr/>
-          <p:nvPr/>
-        </p:nvSpPr>
-        <p:spPr>
-          <a:xfrm>
-            <a:off x="5120640" y="4297680"/>
-            <a:ext cx="0" cy="841248"/>
-          </a:xfrm>
-          <a:prstGeom prst="line">
-            <a:avLst/>
-          </a:prstGeom>
-          <a:noFill/>
-          <a:ln w="19050">
-            <a:solidFill>
-              <a:srgbClr val="C0508A"/>
-            </a:solidFill>
-            <a:prstDash val="dash"/>
-            <a:tailEnd type="arrow"/>
-          </a:ln>
-        </p:spPr>
-      </p:sp>
-      <p:sp>
-        <p:nvSpPr>
           <p:cNvPr id="41" name="text_mejores_metodos"/>
           <p:cNvSpPr txBox="1"/>
           <p:nvPr/>
         </p:nvSpPr>
         <p:spPr>
           <a:xfrm>
-            <a:off x="3931920" y="4480560"/>
-            <a:ext cx="2286000" cy="365760"/>
+            <a:off x="6414573" y="4809913"/>
+            <a:ext cx="2595531" cy="365760"/>
           </a:xfrm>
           <a:prstGeom prst="rect">
             <a:avLst/>
@@ -2035,28 +1939,28 @@
               <a:buNone/>
             </a:pPr>
             <a:r>
-              <a:rPr lang="en-US" sz="850" i="1" dirty="0">
+              <a:rPr lang="en-US" sz="1100" dirty="0">
                 <a:solidFill>
                   <a:srgbClr val="8A2A5A"/>
                 </a:solidFill>
               </a:rPr>
               <a:t>Mejores métodos de normalización</a:t>
             </a:r>
-            <a:endParaRPr lang="en-US" sz="850" dirty="0"/>
+            <a:endParaRPr lang="en-US" sz="1100" dirty="0"/>
           </a:p>
           <a:p>
             <a:pPr marL="0" indent="0" algn="ctr">
               <a:buNone/>
             </a:pPr>
             <a:r>
-              <a:rPr lang="en-US" sz="850" i="1" dirty="0">
+              <a:rPr lang="en-US" sz="1100" dirty="0">
                 <a:solidFill>
                   <a:srgbClr val="8A2A5A"/>
                 </a:solidFill>
               </a:rPr>
               <a:t>e imputación</a:t>
             </a:r>
-            <a:endParaRPr lang="en-US" sz="850" dirty="0"/>
+            <a:endParaRPr lang="en-US" sz="1100" dirty="0"/>
           </a:p>
         </p:txBody>
       </p:sp>
@@ -2068,7 +1972,7 @@
         </p:nvSpPr>
         <p:spPr>
           <a:xfrm>
-            <a:off x="256032" y="4480560"/>
+            <a:off x="280571" y="4785667"/>
             <a:ext cx="2377440" cy="320040"/>
           </a:xfrm>
           <a:prstGeom prst="rect">
@@ -2085,193 +1989,235 @@
               <a:buNone/>
             </a:pPr>
             <a:r>
-              <a:rPr lang="en-US" sz="850" dirty="0">
+              <a:rPr lang="en-US" sz="1100" dirty="0">
                 <a:solidFill>
                   <a:srgbClr val="1A3A6B"/>
                 </a:solidFill>
               </a:rPr>
               <a:t>Métodos de normalización e</a:t>
             </a:r>
-            <a:endParaRPr lang="en-US" sz="850" dirty="0"/>
+            <a:endParaRPr lang="en-US" sz="1100" dirty="0"/>
           </a:p>
           <a:p>
             <a:pPr marL="0" indent="0" algn="ctr">
               <a:buNone/>
             </a:pPr>
             <a:r>
-              <a:rPr lang="en-US" sz="850" dirty="0">
+              <a:rPr lang="en-US" sz="1100" dirty="0">
                 <a:solidFill>
                   <a:srgbClr val="1A3A6B"/>
                 </a:solidFill>
               </a:rPr>
               <a:t>imputación seleccionados</a:t>
             </a:r>
-            <a:endParaRPr lang="en-US" sz="850" dirty="0"/>
+            <a:endParaRPr lang="en-US" sz="1100" dirty="0"/>
           </a:p>
         </p:txBody>
       </p:sp>
-      <p:sp>
-        <p:nvSpPr>
-          <p:cNvPr id="43" name="box_funcional"/>
-          <p:cNvSpPr/>
+      <p:grpSp>
+        <p:nvGrpSpPr>
+          <p:cNvPr id="59" name="Group 58">
+            <a:extLst>
+              <a:ext uri="{FF2B5EF4-FFF2-40B4-BE49-F238E27FC236}">
+                <a16:creationId xmlns:a16="http://schemas.microsoft.com/office/drawing/2014/main" id="{681180BF-A4DE-46DD-988C-6FD8BEF50517}"/>
+              </a:ext>
+            </a:extLst>
+          </p:cNvPr>
+          <p:cNvGrpSpPr/>
           <p:nvPr/>
-        </p:nvSpPr>
-        <p:spPr>
+        </p:nvGrpSpPr>
+        <p:grpSpPr>
           <a:xfrm>
-            <a:off x="8961120" y="4389120"/>
+            <a:off x="8961120" y="4973659"/>
             <a:ext cx="2560320" cy="502920"/>
+            <a:chOff x="8961120" y="4389120"/>
+            <a:chExt cx="2560320" cy="502920"/>
           </a:xfrm>
-          <a:prstGeom prst="roundRect">
-            <a:avLst>
-              <a:gd name="adj" fmla="val 14545"/>
-            </a:avLst>
-          </a:prstGeom>
-          <a:solidFill>
-            <a:srgbClr val="D0DAF0"/>
-          </a:solidFill>
-          <a:ln w="19050">
+        </p:grpSpPr>
+        <p:sp>
+          <p:nvSpPr>
+            <p:cNvPr id="43" name="box_funcional"/>
+            <p:cNvSpPr/>
+            <p:nvPr/>
+          </p:nvSpPr>
+          <p:spPr>
+            <a:xfrm>
+              <a:off x="8961120" y="4389120"/>
+              <a:ext cx="2560320" cy="502920"/>
+            </a:xfrm>
+            <a:prstGeom prst="roundRect">
+              <a:avLst>
+                <a:gd name="adj" fmla="val 14545"/>
+              </a:avLst>
+            </a:prstGeom>
             <a:solidFill>
-              <a:srgbClr val="4A72B8"/>
+              <a:srgbClr val="D0DAF0"/>
             </a:solidFill>
-            <a:prstDash val="dash"/>
-          </a:ln>
-        </p:spPr>
-      </p:sp>
-      <p:sp>
-        <p:nvSpPr>
-          <p:cNvPr id="44" name="text_funcional"/>
-          <p:cNvSpPr txBox="1"/>
+            <a:ln w="19050">
+              <a:solidFill>
+                <a:srgbClr val="4A72B8"/>
+              </a:solidFill>
+              <a:prstDash val="solid"/>
+            </a:ln>
+          </p:spPr>
+        </p:sp>
+        <p:sp>
+          <p:nvSpPr>
+            <p:cNvPr id="44" name="text_funcional"/>
+            <p:cNvSpPr txBox="1"/>
+            <p:nvPr/>
+          </p:nvSpPr>
+          <p:spPr>
+            <a:xfrm>
+              <a:off x="8961120" y="4407408"/>
+              <a:ext cx="2560320" cy="457200"/>
+            </a:xfrm>
+            <a:prstGeom prst="rect">
+              <a:avLst/>
+            </a:prstGeom>
+            <a:noFill/>
+            <a:ln/>
+          </p:spPr>
+          <p:txBody>
+            <a:bodyPr wrap="square" lIns="0" tIns="0" rIns="0" bIns="0" rtlCol="0" anchor="ctr"/>
+            <a:lstStyle/>
+            <a:p>
+              <a:pPr marL="0" indent="0" algn="ctr">
+                <a:buNone/>
+              </a:pPr>
+              <a:r>
+                <a:rPr lang="en-US" sz="1600" b="1" dirty="0">
+                  <a:solidFill>
+                    <a:srgbClr val="1A3A6B"/>
+                  </a:solidFill>
+                </a:rPr>
+                <a:t>Análisis funcional</a:t>
+              </a:r>
+              <a:endParaRPr lang="en-US" sz="1600" dirty="0"/>
+            </a:p>
+          </p:txBody>
+        </p:sp>
+      </p:grpSp>
+      <p:grpSp>
+        <p:nvGrpSpPr>
+          <p:cNvPr id="58" name="Group 57">
+            <a:extLst>
+              <a:ext uri="{FF2B5EF4-FFF2-40B4-BE49-F238E27FC236}">
+                <a16:creationId xmlns:a16="http://schemas.microsoft.com/office/drawing/2014/main" id="{6F69F528-83CF-4F87-AF6F-A801EB6E292B}"/>
+              </a:ext>
+            </a:extLst>
+          </p:cNvPr>
+          <p:cNvGrpSpPr/>
           <p:nvPr/>
-        </p:nvSpPr>
-        <p:spPr>
+        </p:nvGrpSpPr>
+        <p:grpSpPr>
           <a:xfrm>
-            <a:off x="8961120" y="4407408"/>
-            <a:ext cx="2560320" cy="457200"/>
+            <a:off x="8961120" y="5705179"/>
+            <a:ext cx="2560320" cy="640080"/>
+            <a:chOff x="8961120" y="5303520"/>
+            <a:chExt cx="2560320" cy="640080"/>
           </a:xfrm>
-          <a:prstGeom prst="rect">
-            <a:avLst/>
-          </a:prstGeom>
-          <a:noFill/>
-          <a:ln/>
-        </p:spPr>
-        <p:txBody>
-          <a:bodyPr wrap="square" lIns="0" tIns="0" rIns="0" bIns="0" rtlCol="0" anchor="ctr"/>
-          <a:lstStyle/>
-          <a:p>
-            <a:pPr marL="0" indent="0" algn="ctr">
-              <a:buNone/>
-            </a:pPr>
-            <a:r>
-              <a:rPr lang="en-US" sz="1300" b="1" dirty="0">
-                <a:solidFill>
-                  <a:srgbClr val="1A3A6B"/>
-                </a:solidFill>
-              </a:rPr>
-              <a:t>Análisis funcional</a:t>
-            </a:r>
-            <a:endParaRPr lang="en-US" sz="1300" dirty="0"/>
-          </a:p>
-        </p:txBody>
-      </p:sp>
-      <p:sp>
-        <p:nvSpPr>
-          <p:cNvPr id="45" name="box_patrones"/>
-          <p:cNvSpPr/>
-          <p:nvPr/>
-        </p:nvSpPr>
-        <p:spPr>
-          <a:xfrm>
-            <a:off x="8961120" y="5303520"/>
-            <a:ext cx="2560320" cy="640080"/>
-          </a:xfrm>
-          <a:prstGeom prst="roundRect">
-            <a:avLst>
-              <a:gd name="adj" fmla="val 11429"/>
-            </a:avLst>
-          </a:prstGeom>
-          <a:solidFill>
-            <a:srgbClr val="D0DAF0"/>
-          </a:solidFill>
-          <a:ln w="19050">
+        </p:grpSpPr>
+        <p:sp>
+          <p:nvSpPr>
+            <p:cNvPr id="45" name="box_patrones"/>
+            <p:cNvSpPr/>
+            <p:nvPr/>
+          </p:nvSpPr>
+          <p:spPr>
+            <a:xfrm>
+              <a:off x="8961120" y="5303520"/>
+              <a:ext cx="2560320" cy="640080"/>
+            </a:xfrm>
+            <a:prstGeom prst="roundRect">
+              <a:avLst>
+                <a:gd name="adj" fmla="val 11429"/>
+              </a:avLst>
+            </a:prstGeom>
             <a:solidFill>
-              <a:srgbClr val="4A72B8"/>
+              <a:srgbClr val="D0DAF0"/>
             </a:solidFill>
-            <a:prstDash val="dash"/>
-          </a:ln>
-        </p:spPr>
-      </p:sp>
-      <p:sp>
-        <p:nvSpPr>
-          <p:cNvPr id="46" name="text_patrones"/>
-          <p:cNvSpPr txBox="1"/>
-          <p:nvPr/>
-        </p:nvSpPr>
-        <p:spPr>
-          <a:xfrm>
-            <a:off x="8961120" y="5321808"/>
-            <a:ext cx="2560320" cy="320040"/>
-          </a:xfrm>
-          <a:prstGeom prst="rect">
-            <a:avLst/>
-          </a:prstGeom>
-          <a:noFill/>
-          <a:ln/>
-        </p:spPr>
-        <p:txBody>
-          <a:bodyPr wrap="square" lIns="0" tIns="0" rIns="0" bIns="0" rtlCol="0" anchor="ctr"/>
-          <a:lstStyle/>
-          <a:p>
-            <a:pPr marL="0" indent="0" algn="ctr">
-              <a:buNone/>
-            </a:pPr>
-            <a:r>
-              <a:rPr lang="en-US" sz="1300" b="1" dirty="0">
-                <a:solidFill>
-                  <a:srgbClr val="1A3A6B"/>
-                </a:solidFill>
-              </a:rPr>
-              <a:t>Perfilado de patrones</a:t>
-            </a:r>
-            <a:endParaRPr lang="en-US" sz="1300" dirty="0"/>
-          </a:p>
-        </p:txBody>
-      </p:sp>
-      <p:sp>
-        <p:nvSpPr>
-          <p:cNvPr id="47" name="text_patrones_func"/>
-          <p:cNvSpPr txBox="1"/>
-          <p:nvPr/>
-        </p:nvSpPr>
-        <p:spPr>
-          <a:xfrm>
-            <a:off x="8961120" y="5641848"/>
-            <a:ext cx="2560320" cy="228600"/>
-          </a:xfrm>
-          <a:prstGeom prst="rect">
-            <a:avLst/>
-          </a:prstGeom>
-          <a:noFill/>
-          <a:ln/>
-        </p:spPr>
-        <p:txBody>
-          <a:bodyPr wrap="square" lIns="0" tIns="0" rIns="0" bIns="0" rtlCol="0" anchor="ctr"/>
-          <a:lstStyle/>
-          <a:p>
-            <a:pPr marL="0" indent="0" algn="ctr">
-              <a:buNone/>
-            </a:pPr>
-            <a:r>
-              <a:rPr lang="en-US" sz="900" i="1" dirty="0">
-                <a:solidFill>
-                  <a:srgbClr val="2A4A8A"/>
-                </a:solidFill>
-              </a:rPr>
-              <a:t>paquete Mfuzz</a:t>
-            </a:r>
-            <a:endParaRPr lang="en-US" sz="900" dirty="0"/>
-          </a:p>
-        </p:txBody>
-      </p:sp>
+            <a:ln w="19050">
+              <a:solidFill>
+                <a:srgbClr val="4A72B8"/>
+              </a:solidFill>
+              <a:prstDash val="dash"/>
+            </a:ln>
+          </p:spPr>
+        </p:sp>
+        <p:sp>
+          <p:nvSpPr>
+            <p:cNvPr id="46" name="text_patrones"/>
+            <p:cNvSpPr txBox="1"/>
+            <p:nvPr/>
+          </p:nvSpPr>
+          <p:spPr>
+            <a:xfrm>
+              <a:off x="8961120" y="5321808"/>
+              <a:ext cx="2560320" cy="320040"/>
+            </a:xfrm>
+            <a:prstGeom prst="rect">
+              <a:avLst/>
+            </a:prstGeom>
+            <a:noFill/>
+            <a:ln/>
+          </p:spPr>
+          <p:txBody>
+            <a:bodyPr wrap="square" lIns="0" tIns="0" rIns="0" bIns="0" rtlCol="0" anchor="ctr"/>
+            <a:lstStyle/>
+            <a:p>
+              <a:pPr marL="0" indent="0" algn="ctr">
+                <a:buNone/>
+              </a:pPr>
+              <a:r>
+                <a:rPr lang="en-US" sz="1600" b="1" dirty="0">
+                  <a:solidFill>
+                    <a:srgbClr val="1A3A6B"/>
+                  </a:solidFill>
+                </a:rPr>
+                <a:t>Perfilado de patrones</a:t>
+              </a:r>
+              <a:endParaRPr lang="en-US" sz="1600" dirty="0"/>
+            </a:p>
+          </p:txBody>
+        </p:sp>
+        <p:sp>
+          <p:nvSpPr>
+            <p:cNvPr id="47" name="text_patrones_func"/>
+            <p:cNvSpPr txBox="1"/>
+            <p:nvPr/>
+          </p:nvSpPr>
+          <p:spPr>
+            <a:xfrm>
+              <a:off x="8961120" y="5641848"/>
+              <a:ext cx="2560320" cy="228600"/>
+            </a:xfrm>
+            <a:prstGeom prst="rect">
+              <a:avLst/>
+            </a:prstGeom>
+            <a:noFill/>
+            <a:ln/>
+          </p:spPr>
+          <p:txBody>
+            <a:bodyPr wrap="square" lIns="0" tIns="0" rIns="0" bIns="0" rtlCol="0" anchor="ctr"/>
+            <a:lstStyle/>
+            <a:p>
+              <a:pPr marL="0" indent="0" algn="ctr">
+                <a:buNone/>
+              </a:pPr>
+              <a:r>
+                <a:rPr lang="en-US" sz="1000" i="1" dirty="0">
+                  <a:solidFill>
+                    <a:srgbClr val="2A4A8A"/>
+                  </a:solidFill>
+                </a:rPr>
+                <a:t>paquete Mfuzz</a:t>
+              </a:r>
+              <a:endParaRPr lang="en-US" sz="1000" dirty="0"/>
+            </a:p>
+          </p:txBody>
+        </p:sp>
+      </p:grpSp>
       <p:sp>
         <p:nvSpPr>
           <p:cNvPr id="48" name="arrow_prot_to_func"/>
@@ -2279,9 +2225,9 @@
           <p:nvPr/>
         </p:nvSpPr>
         <p:spPr>
-          <a:xfrm>
-            <a:off x="3794760" y="5138928"/>
-            <a:ext cx="5166360" cy="0"/>
+          <a:xfrm flipV="1">
+            <a:off x="4785852" y="5230537"/>
+            <a:ext cx="4175267" cy="541359"/>
           </a:xfrm>
           <a:prstGeom prst="line">
             <a:avLst/>
@@ -2304,8 +2250,8 @@
         </p:nvSpPr>
         <p:spPr>
           <a:xfrm>
-            <a:off x="3794760" y="5257800"/>
-            <a:ext cx="5166360" cy="292608"/>
+            <a:off x="4785852" y="5806610"/>
+            <a:ext cx="4175267" cy="248749"/>
           </a:xfrm>
           <a:prstGeom prst="line">
             <a:avLst/>
@@ -2319,6 +2265,466 @@
             <a:tailEnd type="arrow"/>
           </a:ln>
         </p:spPr>
+        <p:txBody>
+          <a:bodyPr/>
+          <a:lstStyle/>
+          <a:p>
+            <a:endParaRPr lang="es-ES" dirty="0"/>
+          </a:p>
+        </p:txBody>
+      </p:sp>
+      <p:sp>
+        <p:nvSpPr>
+          <p:cNvPr id="57" name="arrow_norm_to_prot">
+            <a:extLst>
+              <a:ext uri="{FF2B5EF4-FFF2-40B4-BE49-F238E27FC236}">
+                <a16:creationId xmlns:a16="http://schemas.microsoft.com/office/drawing/2014/main" id="{F11EC694-3FE5-4651-BEDF-6E6B7A61CBA5}"/>
+              </a:ext>
+            </a:extLst>
+          </p:cNvPr>
+          <p:cNvSpPr/>
+          <p:nvPr/>
+        </p:nvSpPr>
+        <p:spPr>
+          <a:xfrm flipH="1">
+            <a:off x="3023771" y="4342650"/>
+            <a:ext cx="770989" cy="1105914"/>
+          </a:xfrm>
+          <a:prstGeom prst="line">
+            <a:avLst/>
+          </a:prstGeom>
+          <a:noFill/>
+          <a:ln w="19050">
+            <a:solidFill>
+              <a:srgbClr val="1A3A6B"/>
+            </a:solidFill>
+            <a:prstDash val="solid"/>
+            <a:tailEnd type="arrow"/>
+          </a:ln>
+        </p:spPr>
+      </p:sp>
+      <p:grpSp>
+        <p:nvGrpSpPr>
+          <p:cNvPr id="56" name="Group 55">
+            <a:extLst>
+              <a:ext uri="{FF2B5EF4-FFF2-40B4-BE49-F238E27FC236}">
+                <a16:creationId xmlns:a16="http://schemas.microsoft.com/office/drawing/2014/main" id="{C2B2E47C-00C2-43DA-BD9E-9C21DA2AB206}"/>
+              </a:ext>
+            </a:extLst>
+          </p:cNvPr>
+          <p:cNvGrpSpPr/>
+          <p:nvPr/>
+        </p:nvGrpSpPr>
+        <p:grpSpPr>
+          <a:xfrm>
+            <a:off x="230630" y="3371428"/>
+            <a:ext cx="2631093" cy="936000"/>
+            <a:chOff x="256032" y="3337560"/>
+            <a:chExt cx="2286000" cy="936000"/>
+          </a:xfrm>
+        </p:grpSpPr>
+        <p:sp>
+          <p:nvSpPr>
+            <p:cNvPr id="22" name="box_norm"/>
+            <p:cNvSpPr/>
+            <p:nvPr/>
+          </p:nvSpPr>
+          <p:spPr>
+            <a:xfrm>
+              <a:off x="256032" y="3337560"/>
+              <a:ext cx="2286000" cy="936000"/>
+            </a:xfrm>
+            <a:prstGeom prst="roundRect">
+              <a:avLst>
+                <a:gd name="adj" fmla="val 8889"/>
+              </a:avLst>
+            </a:prstGeom>
+            <a:solidFill>
+              <a:srgbClr val="D0DAF0"/>
+            </a:solidFill>
+            <a:ln w="15240">
+              <a:solidFill>
+                <a:srgbClr val="4A72B8"/>
+              </a:solidFill>
+              <a:prstDash val="solid"/>
+            </a:ln>
+          </p:spPr>
+        </p:sp>
+        <p:sp>
+          <p:nvSpPr>
+            <p:cNvPr id="23" name="text_norm"/>
+            <p:cNvSpPr txBox="1"/>
+            <p:nvPr/>
+          </p:nvSpPr>
+          <p:spPr>
+            <a:xfrm>
+              <a:off x="256033" y="3355848"/>
+              <a:ext cx="2285999" cy="457200"/>
+            </a:xfrm>
+            <a:prstGeom prst="rect">
+              <a:avLst/>
+            </a:prstGeom>
+            <a:noFill/>
+            <a:ln/>
+          </p:spPr>
+          <p:txBody>
+            <a:bodyPr wrap="square" lIns="0" tIns="0" rIns="0" bIns="0" rtlCol="0" anchor="ctr"/>
+            <a:lstStyle/>
+            <a:p>
+              <a:pPr marL="0" indent="0" algn="ctr">
+                <a:buNone/>
+              </a:pPr>
+              <a:r>
+                <a:rPr lang="en-US" sz="1400" b="1" dirty="0">
+                  <a:solidFill>
+                    <a:srgbClr val="1A3A6B"/>
+                  </a:solidFill>
+                </a:rPr>
+                <a:t>Análisis de </a:t>
+              </a:r>
+              <a:r>
+                <a:rPr lang="en-US" sz="1400" b="1" dirty="0" err="1">
+                  <a:solidFill>
+                    <a:srgbClr val="1A3A6B"/>
+                  </a:solidFill>
+                </a:rPr>
+                <a:t>métricas</a:t>
+              </a:r>
+              <a:r>
+                <a:rPr lang="en-US" sz="1400" b="1" dirty="0">
+                  <a:solidFill>
+                    <a:srgbClr val="1A3A6B"/>
+                  </a:solidFill>
+                </a:rPr>
+                <a:t> de normalización</a:t>
+              </a:r>
+              <a:endParaRPr lang="en-US" sz="1400" dirty="0"/>
+            </a:p>
+          </p:txBody>
+        </p:sp>
+        <p:sp>
+          <p:nvSpPr>
+            <p:cNvPr id="24" name="text_norm_func"/>
+            <p:cNvSpPr txBox="1"/>
+            <p:nvPr/>
+          </p:nvSpPr>
+          <p:spPr>
+            <a:xfrm>
+              <a:off x="347472" y="3813048"/>
+              <a:ext cx="2103120" cy="320040"/>
+            </a:xfrm>
+            <a:prstGeom prst="rect">
+              <a:avLst/>
+            </a:prstGeom>
+            <a:noFill/>
+            <a:ln/>
+          </p:spPr>
+          <p:txBody>
+            <a:bodyPr wrap="square" lIns="0" tIns="0" rIns="0" bIns="0" rtlCol="0" anchor="ctr"/>
+            <a:lstStyle/>
+            <a:p>
+              <a:pPr marL="0" indent="0" algn="ctr">
+                <a:buNone/>
+              </a:pPr>
+              <a:r>
+                <a:rPr lang="en-US" sz="1000" i="1" dirty="0">
+                  <a:solidFill>
+                    <a:srgbClr val="2A4A8A"/>
+                  </a:solidFill>
+                </a:rPr>
+                <a:t>nm_prepare_se()</a:t>
+              </a:r>
+              <a:endParaRPr lang="en-US" sz="1000" dirty="0"/>
+            </a:p>
+            <a:p>
+              <a:pPr marL="0" indent="0" algn="ctr">
+                <a:buNone/>
+              </a:pPr>
+              <a:r>
+                <a:rPr lang="en-US" sz="1000" i="1" dirty="0">
+                  <a:solidFill>
+                    <a:srgbClr val="2A4A8A"/>
+                  </a:solidFill>
+                </a:rPr>
+                <a:t>normalization_metrics()</a:t>
+              </a:r>
+              <a:endParaRPr lang="en-US" sz="1000" dirty="0"/>
+            </a:p>
+          </p:txBody>
+        </p:sp>
+      </p:grpSp>
+      <p:grpSp>
+        <p:nvGrpSpPr>
+          <p:cNvPr id="55" name="Group 54">
+            <a:extLst>
+              <a:ext uri="{FF2B5EF4-FFF2-40B4-BE49-F238E27FC236}">
+                <a16:creationId xmlns:a16="http://schemas.microsoft.com/office/drawing/2014/main" id="{865C0A78-F9BF-40F6-A964-452957C1988A}"/>
+              </a:ext>
+            </a:extLst>
+          </p:cNvPr>
+          <p:cNvGrpSpPr/>
+          <p:nvPr/>
+        </p:nvGrpSpPr>
+        <p:grpSpPr>
+          <a:xfrm>
+            <a:off x="3103879" y="3371428"/>
+            <a:ext cx="2631093" cy="936000"/>
+            <a:chOff x="3129281" y="3337560"/>
+            <a:chExt cx="2286000" cy="936000"/>
+          </a:xfrm>
+        </p:grpSpPr>
+        <p:sp>
+          <p:nvSpPr>
+            <p:cNvPr id="25" name="box_imp"/>
+            <p:cNvSpPr/>
+            <p:nvPr/>
+          </p:nvSpPr>
+          <p:spPr>
+            <a:xfrm>
+              <a:off x="3129281" y="3337560"/>
+              <a:ext cx="2286000" cy="936000"/>
+            </a:xfrm>
+            <a:prstGeom prst="roundRect">
+              <a:avLst>
+                <a:gd name="adj" fmla="val 7619"/>
+              </a:avLst>
+            </a:prstGeom>
+            <a:solidFill>
+              <a:srgbClr val="D0DAF0"/>
+            </a:solidFill>
+            <a:ln w="15240">
+              <a:solidFill>
+                <a:srgbClr val="4A72B8"/>
+              </a:solidFill>
+              <a:prstDash val="solid"/>
+            </a:ln>
+          </p:spPr>
+        </p:sp>
+        <p:sp>
+          <p:nvSpPr>
+            <p:cNvPr id="26" name="text_imp"/>
+            <p:cNvSpPr txBox="1"/>
+            <p:nvPr/>
+          </p:nvSpPr>
+          <p:spPr>
+            <a:xfrm>
+              <a:off x="3129281" y="3355848"/>
+              <a:ext cx="2286000" cy="365760"/>
+            </a:xfrm>
+            <a:prstGeom prst="rect">
+              <a:avLst/>
+            </a:prstGeom>
+            <a:noFill/>
+            <a:ln/>
+          </p:spPr>
+          <p:txBody>
+            <a:bodyPr wrap="square" lIns="0" tIns="0" rIns="0" bIns="0" rtlCol="0" anchor="ctr"/>
+            <a:lstStyle/>
+            <a:p>
+              <a:pPr marL="0" indent="0" algn="ctr">
+                <a:buNone/>
+              </a:pPr>
+              <a:r>
+                <a:rPr lang="en-US" sz="1400" b="1" dirty="0">
+                  <a:solidFill>
+                    <a:srgbClr val="1A3A6B"/>
+                  </a:solidFill>
+                </a:rPr>
+                <a:t>Análisis de </a:t>
+              </a:r>
+              <a:r>
+                <a:rPr lang="en-US" sz="1400" b="1" dirty="0" err="1">
+                  <a:solidFill>
+                    <a:srgbClr val="1A3A6B"/>
+                  </a:solidFill>
+                </a:rPr>
+                <a:t>métricas</a:t>
+              </a:r>
+              <a:r>
+                <a:rPr lang="en-US" sz="1400" b="1" dirty="0">
+                  <a:solidFill>
+                    <a:srgbClr val="1A3A6B"/>
+                  </a:solidFill>
+                </a:rPr>
+                <a:t> de </a:t>
+              </a:r>
+            </a:p>
+            <a:p>
+              <a:pPr marL="0" indent="0" algn="ctr">
+                <a:buNone/>
+              </a:pPr>
+              <a:r>
+                <a:rPr lang="en-US" sz="1400" b="1" dirty="0" err="1">
+                  <a:solidFill>
+                    <a:srgbClr val="1A3A6B"/>
+                  </a:solidFill>
+                </a:rPr>
+                <a:t>imputación</a:t>
+              </a:r>
+              <a:endParaRPr lang="en-US" sz="1400" dirty="0"/>
+            </a:p>
+          </p:txBody>
+        </p:sp>
+        <p:sp>
+          <p:nvSpPr>
+            <p:cNvPr id="27" name="text_imp_sub"/>
+            <p:cNvSpPr txBox="1"/>
+            <p:nvPr/>
+          </p:nvSpPr>
+          <p:spPr>
+            <a:xfrm>
+              <a:off x="3129281" y="3721608"/>
+              <a:ext cx="2286000" cy="201168"/>
+            </a:xfrm>
+            <a:prstGeom prst="rect">
+              <a:avLst/>
+            </a:prstGeom>
+            <a:noFill/>
+            <a:ln/>
+          </p:spPr>
+          <p:txBody>
+            <a:bodyPr wrap="square" lIns="0" tIns="0" rIns="0" bIns="0" rtlCol="0" anchor="ctr"/>
+            <a:lstStyle/>
+            <a:p>
+              <a:pPr marL="0" indent="0" algn="ctr">
+                <a:buNone/>
+              </a:pPr>
+              <a:r>
+                <a:rPr lang="en-US" sz="900" dirty="0">
+                  <a:solidFill>
+                    <a:srgbClr val="1A3A6B"/>
+                  </a:solidFill>
+                </a:rPr>
+                <a:t>(para NAs MAR)</a:t>
+              </a:r>
+              <a:endParaRPr lang="en-US" sz="900" dirty="0"/>
+            </a:p>
+          </p:txBody>
+        </p:sp>
+        <p:sp>
+          <p:nvSpPr>
+            <p:cNvPr id="28" name="text_imp_func"/>
+            <p:cNvSpPr txBox="1"/>
+            <p:nvPr/>
+          </p:nvSpPr>
+          <p:spPr>
+            <a:xfrm>
+              <a:off x="3129281" y="3922776"/>
+              <a:ext cx="2286000" cy="320040"/>
+            </a:xfrm>
+            <a:prstGeom prst="rect">
+              <a:avLst/>
+            </a:prstGeom>
+            <a:noFill/>
+            <a:ln/>
+          </p:spPr>
+          <p:txBody>
+            <a:bodyPr wrap="square" lIns="0" tIns="0" rIns="0" bIns="0" rtlCol="0" anchor="ctr"/>
+            <a:lstStyle/>
+            <a:p>
+              <a:pPr marL="0" indent="0" algn="ctr">
+                <a:buNone/>
+              </a:pPr>
+              <a:r>
+                <a:rPr lang="en-US" sz="1000" i="1" dirty="0">
+                  <a:solidFill>
+                    <a:srgbClr val="2A4A8A"/>
+                  </a:solidFill>
+                </a:rPr>
+                <a:t>im_prepare_se()</a:t>
+              </a:r>
+              <a:endParaRPr lang="en-US" sz="1000" dirty="0"/>
+            </a:p>
+            <a:p>
+              <a:pPr marL="0" indent="0" algn="ctr">
+                <a:buNone/>
+              </a:pPr>
+              <a:r>
+                <a:rPr lang="en-US" sz="1000" i="1" dirty="0">
+                  <a:solidFill>
+                    <a:srgbClr val="2A4A8A"/>
+                  </a:solidFill>
+                </a:rPr>
+                <a:t>imputation_metrics()</a:t>
+              </a:r>
+              <a:endParaRPr lang="en-US" sz="1000" dirty="0"/>
+            </a:p>
+          </p:txBody>
+        </p:sp>
+      </p:grpSp>
+      <p:sp>
+        <p:nvSpPr>
+          <p:cNvPr id="60" name="arrow_prot_to_pat">
+            <a:extLst>
+              <a:ext uri="{FF2B5EF4-FFF2-40B4-BE49-F238E27FC236}">
+                <a16:creationId xmlns:a16="http://schemas.microsoft.com/office/drawing/2014/main" id="{D0D5458C-F3A1-42D5-A788-FC3F0EA707B3}"/>
+              </a:ext>
+            </a:extLst>
+          </p:cNvPr>
+          <p:cNvSpPr/>
+          <p:nvPr/>
+        </p:nvSpPr>
+        <p:spPr>
+          <a:xfrm flipV="1">
+            <a:off x="4722705" y="4276683"/>
+            <a:ext cx="1863639" cy="1148811"/>
+          </a:xfrm>
+          <a:prstGeom prst="line">
+            <a:avLst/>
+          </a:prstGeom>
+          <a:noFill/>
+          <a:ln w="19050">
+            <a:solidFill>
+              <a:srgbClr val="8A2060"/>
+            </a:solidFill>
+            <a:prstDash val="dash"/>
+            <a:tailEnd type="arrow"/>
+          </a:ln>
+        </p:spPr>
+        <p:txBody>
+          <a:bodyPr/>
+          <a:lstStyle/>
+          <a:p>
+            <a:endParaRPr lang="es-ES" dirty="0"/>
+          </a:p>
+        </p:txBody>
+      </p:sp>
+      <p:sp>
+        <p:nvSpPr>
+          <p:cNvPr id="61" name="arrow_prot_to_pat">
+            <a:extLst>
+              <a:ext uri="{FF2B5EF4-FFF2-40B4-BE49-F238E27FC236}">
+                <a16:creationId xmlns:a16="http://schemas.microsoft.com/office/drawing/2014/main" id="{A56C8B3E-6A03-4265-BAA5-95FF4EC7DFF9}"/>
+              </a:ext>
+            </a:extLst>
+          </p:cNvPr>
+          <p:cNvSpPr/>
+          <p:nvPr/>
+        </p:nvSpPr>
+        <p:spPr>
+          <a:xfrm rot="10800000" flipV="1">
+            <a:off x="4773689" y="4673188"/>
+            <a:ext cx="2220270" cy="842410"/>
+          </a:xfrm>
+          <a:prstGeom prst="line">
+            <a:avLst/>
+          </a:prstGeom>
+          <a:noFill/>
+          <a:ln w="19050">
+            <a:solidFill>
+              <a:srgbClr val="8A2060"/>
+            </a:solidFill>
+            <a:prstDash val="dash"/>
+            <a:tailEnd type="arrow"/>
+          </a:ln>
+        </p:spPr>
+        <p:txBody>
+          <a:bodyPr/>
+          <a:lstStyle/>
+          <a:p>
+            <a:endParaRPr lang="es-ES" dirty="0"/>
+          </a:p>
+        </p:txBody>
       </p:sp>
     </p:spTree>
   </p:cSld>

--- a/Docs/pics/Workflow_NADIA_ESP.pptx
+++ b/Docs/pics/Workflow_NADIA_ESP.pptx
@@ -676,42 +676,113 @@
             <a:prstDash val="solid"/>
           </a:ln>
         </p:spPr>
+        <p:txBody>
+          <a:bodyPr/>
+          <a:lstStyle/>
+          <a:p>
+            <a:endParaRPr lang="es-ES"/>
+          </a:p>
+        </p:txBody>
       </p:sp>
-      <p:sp>
-        <p:nvSpPr>
-          <p:cNvPr id="3" name="circle_1"/>
-          <p:cNvSpPr/>
+      <p:grpSp>
+        <p:nvGrpSpPr>
+          <p:cNvPr id="34" name="Group 33">
+            <a:extLst>
+              <a:ext uri="{FF2B5EF4-FFF2-40B4-BE49-F238E27FC236}">
+                <a16:creationId xmlns:a16="http://schemas.microsoft.com/office/drawing/2014/main" id="{75110255-6E3A-27DA-76DF-162B1E4FC3FD}"/>
+              </a:ext>
+            </a:extLst>
+          </p:cNvPr>
+          <p:cNvGrpSpPr/>
           <p:nvPr/>
-        </p:nvSpPr>
-        <p:spPr>
+        </p:nvGrpSpPr>
+        <p:grpSpPr>
           <a:xfrm>
-            <a:off x="201168" y="155448"/>
-            <a:ext cx="256032" cy="256032"/>
+            <a:off x="224365" y="155447"/>
+            <a:ext cx="395732" cy="404241"/>
+            <a:chOff x="201168" y="155448"/>
+            <a:chExt cx="256032" cy="256032"/>
           </a:xfrm>
-          <a:prstGeom prst="ellipse">
-            <a:avLst/>
-          </a:prstGeom>
-          <a:solidFill>
-            <a:srgbClr val="3A7D52"/>
-          </a:solidFill>
-          <a:ln w="12700">
+        </p:grpSpPr>
+        <p:sp>
+          <p:nvSpPr>
+            <p:cNvPr id="3" name="circle_1"/>
+            <p:cNvSpPr/>
+            <p:nvPr/>
+          </p:nvSpPr>
+          <p:spPr>
+            <a:xfrm>
+              <a:off x="201168" y="155448"/>
+              <a:ext cx="256032" cy="256032"/>
+            </a:xfrm>
+            <a:prstGeom prst="ellipse">
+              <a:avLst/>
+            </a:prstGeom>
             <a:solidFill>
               <a:srgbClr val="3A7D52"/>
             </a:solidFill>
-            <a:prstDash val="solid"/>
-          </a:ln>
-        </p:spPr>
-      </p:sp>
+            <a:ln w="12700">
+              <a:solidFill>
+                <a:srgbClr val="3A7D52"/>
+              </a:solidFill>
+              <a:prstDash val="solid"/>
+            </a:ln>
+          </p:spPr>
+          <p:txBody>
+            <a:bodyPr/>
+            <a:lstStyle/>
+            <a:p>
+              <a:endParaRPr lang="es-ES"/>
+            </a:p>
+          </p:txBody>
+        </p:sp>
+        <p:sp>
+          <p:nvSpPr>
+            <p:cNvPr id="4" name="label_1"/>
+            <p:cNvSpPr txBox="1"/>
+            <p:nvPr/>
+          </p:nvSpPr>
+          <p:spPr>
+            <a:xfrm>
+              <a:off x="201168" y="155448"/>
+              <a:ext cx="256032" cy="256032"/>
+            </a:xfrm>
+            <a:prstGeom prst="rect">
+              <a:avLst/>
+            </a:prstGeom>
+            <a:noFill/>
+            <a:ln/>
+          </p:spPr>
+          <p:txBody>
+            <a:bodyPr wrap="square" rtlCol="0" anchor="ctr"/>
+            <a:lstStyle/>
+            <a:p>
+              <a:pPr marL="0" indent="0" algn="ctr">
+                <a:buNone/>
+              </a:pPr>
+              <a:r>
+                <a:rPr lang="en-US" sz="2000" b="1" dirty="0">
+                  <a:solidFill>
+                    <a:srgbClr val="FFFFFF"/>
+                  </a:solidFill>
+                </a:rPr>
+                <a:t>1</a:t>
+              </a:r>
+              <a:endParaRPr lang="en-US" sz="2000" dirty="0"/>
+            </a:p>
+          </p:txBody>
+        </p:sp>
+      </p:grpSp>
       <p:sp>
         <p:nvSpPr>
-          <p:cNvPr id="4" name="label_1"/>
+          <p:cNvPr id="5" name="title_sec1"/>
           <p:cNvSpPr txBox="1"/>
           <p:nvPr/>
         </p:nvSpPr>
         <p:spPr>
           <a:xfrm>
-            <a:off x="201168" y="155448"/>
-            <a:ext cx="256032" cy="256032"/>
+            <a:off x="5421521" y="672783"/>
+            <a:ext cx="6200985" cy="452586"/>
           </a:xfrm>
           <a:prstGeom prst="rect">
             <a:avLst/>
@@ -723,43 +794,7 @@
           <a:bodyPr wrap="square" rtlCol="0" anchor="ctr"/>
           <a:lstStyle/>
           <a:p>
-            <a:pPr marL="0" indent="0" algn="ctr">
-              <a:buNone/>
-            </a:pPr>
-            <a:r>
-              <a:rPr lang="en-US" sz="1100" b="1" dirty="0">
-                <a:solidFill>
-                  <a:srgbClr val="FFFFFF"/>
-                </a:solidFill>
-              </a:rPr>
-              <a:t>1</a:t>
-            </a:r>
-            <a:endParaRPr lang="en-US" sz="1100" dirty="0"/>
-          </a:p>
-        </p:txBody>
-      </p:sp>
-      <p:sp>
-        <p:nvSpPr>
-          <p:cNvPr id="5" name="title_sec1"/>
-          <p:cNvSpPr txBox="1"/>
-          <p:nvPr/>
-        </p:nvSpPr>
-        <p:spPr>
-          <a:xfrm>
-            <a:off x="5046135" y="521208"/>
-            <a:ext cx="6200985" cy="731520"/>
-          </a:xfrm>
-          <a:prstGeom prst="rect">
-            <a:avLst/>
-          </a:prstGeom>
-          <a:noFill/>
-          <a:ln/>
-        </p:spPr>
-        <p:txBody>
-          <a:bodyPr wrap="square" rtlCol="0" anchor="ctr"/>
-          <a:lstStyle/>
-          <a:p>
-            <a:pPr marL="0" indent="0" algn="ctr">
+            <a:pPr marL="0" indent="0" algn="r">
               <a:buNone/>
             </a:pPr>
             <a:r>
@@ -768,21 +803,31 @@
                   <a:srgbClr val="2A6B42"/>
                 </a:solidFill>
               </a:rPr>
-              <a:t>Procesamiento de datos brutos</a:t>
+              <a:t>Procesamiento de </a:t>
             </a:r>
-            <a:endParaRPr lang="en-US" sz="3200" dirty="0"/>
-          </a:p>
-          <a:p>
-            <a:pPr marL="0" indent="0" algn="ctr">
-              <a:buNone/>
-            </a:pPr>
+            <a:r>
+              <a:rPr lang="en-US" sz="3200" b="1" dirty="0" err="1">
+                <a:solidFill>
+                  <a:srgbClr val="2A6B42"/>
+                </a:solidFill>
+              </a:rPr>
+              <a:t>datos</a:t>
+            </a:r>
             <a:r>
               <a:rPr lang="en-US" sz="3200" b="1" dirty="0">
                 <a:solidFill>
                   <a:srgbClr val="2A6B42"/>
                 </a:solidFill>
               </a:rPr>
-              <a:t>fuera de NADIA</a:t>
+              <a:t> </a:t>
+            </a:r>
+            <a:r>
+              <a:rPr lang="en-US" sz="3200" b="1" dirty="0" err="1">
+                <a:solidFill>
+                  <a:srgbClr val="2A6B42"/>
+                </a:solidFill>
+              </a:rPr>
+              <a:t>brutos</a:t>
             </a:r>
             <a:endParaRPr lang="en-US" sz="3200" dirty="0"/>
           </a:p>
@@ -834,6 +879,13 @@
               <a:prstDash val="solid"/>
             </a:ln>
           </p:spPr>
+          <p:txBody>
+            <a:bodyPr/>
+            <a:lstStyle/>
+            <a:p>
+              <a:endParaRPr lang="es-ES" sz="2000"/>
+            </a:p>
+          </p:txBody>
         </p:sp>
         <p:sp>
           <p:nvSpPr>
@@ -843,7 +895,7 @@
           </p:nvSpPr>
           <p:spPr>
             <a:xfrm>
-              <a:off x="548640" y="201168"/>
+              <a:off x="548640" y="223393"/>
               <a:ext cx="2011680" cy="292608"/>
             </a:xfrm>
             <a:prstGeom prst="rect">
@@ -860,14 +912,14 @@
                 <a:buNone/>
               </a:pPr>
               <a:r>
-                <a:rPr lang="en-US" sz="1400" b="1" dirty="0">
+                <a:rPr lang="en-US" sz="1600" b="1" dirty="0">
                   <a:solidFill>
                     <a:srgbClr val="1A4A2E"/>
                   </a:solidFill>
                 </a:rPr>
                 <a:t>Datos brutos</a:t>
               </a:r>
-              <a:endParaRPr lang="en-US" sz="1400" dirty="0"/>
+              <a:endParaRPr lang="en-US" sz="1600" dirty="0"/>
             </a:p>
           </p:txBody>
         </p:sp>
@@ -879,7 +931,7 @@
           </p:nvSpPr>
           <p:spPr>
             <a:xfrm>
-              <a:off x="548640" y="493776"/>
+              <a:off x="548640" y="439801"/>
               <a:ext cx="2011680" cy="256032"/>
             </a:xfrm>
             <a:prstGeom prst="rect">
@@ -896,14 +948,14 @@
                 <a:buNone/>
               </a:pPr>
               <a:r>
-                <a:rPr lang="en-US" sz="1050" dirty="0">
+                <a:rPr lang="en-US" sz="1100" dirty="0">
                   <a:solidFill>
                     <a:srgbClr val="2A6B42"/>
                   </a:solidFill>
                 </a:rPr>
                 <a:t>de nanoLC-MS/MS</a:t>
               </a:r>
-              <a:endParaRPr lang="en-US" sz="1050" dirty="0"/>
+              <a:endParaRPr lang="en-US" sz="1100" dirty="0"/>
             </a:p>
           </p:txBody>
         </p:sp>
@@ -931,6 +983,13 @@
             <a:tailEnd type="arrow"/>
           </a:ln>
         </p:spPr>
+        <p:txBody>
+          <a:bodyPr/>
+          <a:lstStyle/>
+          <a:p>
+            <a:endParaRPr lang="es-ES"/>
+          </a:p>
+        </p:txBody>
       </p:sp>
       <p:grpSp>
         <p:nvGrpSpPr>
@@ -978,6 +1037,13 @@
               <a:prstDash val="solid"/>
             </a:ln>
           </p:spPr>
+          <p:txBody>
+            <a:bodyPr/>
+            <a:lstStyle/>
+            <a:p>
+              <a:endParaRPr lang="es-ES" sz="2000"/>
+            </a:p>
+          </p:txBody>
         </p:sp>
         <p:sp>
           <p:nvSpPr>
@@ -987,7 +1053,7 @@
           </p:nvSpPr>
           <p:spPr>
             <a:xfrm>
-              <a:off x="548640" y="1069848"/>
+              <a:off x="548640" y="1111123"/>
               <a:ext cx="2011680" cy="274320"/>
             </a:xfrm>
             <a:prstGeom prst="rect">
@@ -1004,14 +1070,14 @@
                 <a:buNone/>
               </a:pPr>
               <a:r>
-                <a:rPr lang="en-US" sz="1400" b="1" dirty="0">
+                <a:rPr lang="en-US" sz="1600" b="1" dirty="0">
                   <a:solidFill>
                     <a:srgbClr val="1A4A2E"/>
                   </a:solidFill>
                 </a:rPr>
                 <a:t>Spectronaut</a:t>
               </a:r>
-              <a:endParaRPr lang="en-US" sz="1400" dirty="0"/>
+              <a:endParaRPr lang="en-US" sz="1600" dirty="0"/>
             </a:p>
           </p:txBody>
         </p:sp>
@@ -1023,7 +1089,7 @@
           </p:nvSpPr>
           <p:spPr>
             <a:xfrm>
-              <a:off x="548640" y="1344168"/>
+              <a:off x="548640" y="1312418"/>
               <a:ext cx="2011680" cy="256032"/>
             </a:xfrm>
             <a:prstGeom prst="rect">
@@ -1040,14 +1106,14 @@
                 <a:buNone/>
               </a:pPr>
               <a:r>
-                <a:rPr lang="en-US" sz="1050" dirty="0">
+                <a:rPr lang="en-US" sz="1100" dirty="0">
                   <a:solidFill>
                     <a:srgbClr val="2A6B42"/>
                   </a:solidFill>
                 </a:rPr>
                 <a:t>Inferencia de proteínas</a:t>
               </a:r>
-              <a:endParaRPr lang="en-US" sz="1050" dirty="0"/>
+              <a:endParaRPr lang="en-US" sz="1100" dirty="0"/>
             </a:p>
           </p:txBody>
         </p:sp>
@@ -1078,65 +1144,11 @@
             <a:prstDash val="solid"/>
           </a:ln>
         </p:spPr>
-      </p:sp>
-      <p:sp>
-        <p:nvSpPr>
-          <p:cNvPr id="14" name="circle_2"/>
-          <p:cNvSpPr/>
-          <p:nvPr/>
-        </p:nvSpPr>
-        <p:spPr>
-          <a:xfrm>
-            <a:off x="201168" y="2011680"/>
-            <a:ext cx="256032" cy="256032"/>
-          </a:xfrm>
-          <a:prstGeom prst="ellipse">
-            <a:avLst/>
-          </a:prstGeom>
-          <a:solidFill>
-            <a:srgbClr val="2A4A8A"/>
-          </a:solidFill>
-          <a:ln w="12700">
-            <a:solidFill>
-              <a:srgbClr val="2A4A8A"/>
-            </a:solidFill>
-            <a:prstDash val="solid"/>
-          </a:ln>
-        </p:spPr>
-      </p:sp>
-      <p:sp>
-        <p:nvSpPr>
-          <p:cNvPr id="15" name="label_2"/>
-          <p:cNvSpPr txBox="1"/>
-          <p:nvPr/>
-        </p:nvSpPr>
-        <p:spPr>
-          <a:xfrm>
-            <a:off x="201168" y="2011680"/>
-            <a:ext cx="256032" cy="256032"/>
-          </a:xfrm>
-          <a:prstGeom prst="rect">
-            <a:avLst/>
-          </a:prstGeom>
-          <a:noFill/>
-          <a:ln/>
-        </p:spPr>
         <p:txBody>
-          <a:bodyPr wrap="square" rtlCol="0" anchor="ctr"/>
+          <a:bodyPr/>
           <a:lstStyle/>
           <a:p>
-            <a:pPr marL="0" indent="0" algn="ctr">
-              <a:buNone/>
-            </a:pPr>
-            <a:r>
-              <a:rPr lang="en-US" sz="1100" b="1" dirty="0">
-                <a:solidFill>
-                  <a:srgbClr val="FFFFFF"/>
-                </a:solidFill>
-              </a:rPr>
-              <a:t>2</a:t>
-            </a:r>
-            <a:endParaRPr lang="en-US" sz="1100" dirty="0"/>
+            <a:endParaRPr lang="es-ES"/>
           </a:p>
         </p:txBody>
       </p:sp>
@@ -1148,8 +1160,8 @@
         </p:nvSpPr>
         <p:spPr>
           <a:xfrm>
-            <a:off x="4114800" y="2078058"/>
-            <a:ext cx="7315200" cy="320040"/>
+            <a:off x="6687724" y="2078058"/>
+            <a:ext cx="4934781" cy="274320"/>
           </a:xfrm>
           <a:prstGeom prst="rect">
             <a:avLst/>
@@ -1170,6 +1182,7 @@
             </a:lvl1pPr>
           </a:lstStyle>
           <a:p>
+            <a:pPr algn="r"/>
             <a:r>
               <a:rPr lang="en-US" dirty="0" err="1">
                 <a:solidFill>
@@ -1184,23 +1197,7 @@
                   <a:srgbClr val="1A3A6B"/>
                 </a:solidFill>
               </a:rPr>
-              <a:t> </a:t>
-            </a:r>
-            <a:r>
-              <a:rPr lang="en-US" dirty="0" err="1">
-                <a:solidFill>
-                  <a:srgbClr val="1A3A6B"/>
-                </a:solidFill>
-              </a:rPr>
-              <a:t>dependiente</a:t>
-            </a:r>
-            <a:r>
-              <a:rPr lang="en-US" dirty="0">
-                <a:solidFill>
-                  <a:srgbClr val="1A3A6B"/>
-                </a:solidFill>
-              </a:rPr>
-              <a:t> de NADIA</a:t>
+              <a:t> con NADIA</a:t>
             </a:r>
           </a:p>
         </p:txBody>
@@ -1251,6 +1248,13 @@
               <a:prstDash val="solid"/>
             </a:ln>
           </p:spPr>
+          <p:txBody>
+            <a:bodyPr/>
+            <a:lstStyle/>
+            <a:p>
+              <a:endParaRPr lang="es-ES" sz="2000"/>
+            </a:p>
+          </p:txBody>
         </p:sp>
         <p:sp>
           <p:nvSpPr>
@@ -1260,7 +1264,7 @@
           </p:nvSpPr>
           <p:spPr>
             <a:xfrm>
-              <a:off x="1188720" y="2176272"/>
+              <a:off x="1188720" y="2208022"/>
               <a:ext cx="2560320" cy="274320"/>
             </a:xfrm>
             <a:prstGeom prst="rect">
@@ -1277,14 +1281,14 @@
                 <a:buNone/>
               </a:pPr>
               <a:r>
-                <a:rPr lang="en-US" sz="1400" b="1" dirty="0">
+                <a:rPr lang="en-US" sz="1600" b="1" dirty="0">
                   <a:solidFill>
                     <a:srgbClr val="1A3A6B"/>
                   </a:solidFill>
                 </a:rPr>
                 <a:t>Preprocesamiento con NADIA</a:t>
               </a:r>
-              <a:endParaRPr lang="en-US" sz="1400" dirty="0"/>
+              <a:endParaRPr lang="en-US" sz="1600" dirty="0"/>
             </a:p>
           </p:txBody>
         </p:sp>
@@ -1313,14 +1317,14 @@
                 <a:buNone/>
               </a:pPr>
               <a:r>
-                <a:rPr lang="en-US" sz="1000" i="1" dirty="0">
+                <a:rPr lang="en-US" sz="1050" i="1" dirty="0">
                   <a:solidFill>
                     <a:srgbClr val="2A4A8A"/>
                   </a:solidFill>
                 </a:rPr>
                 <a:t>preprocessing_spectronaut()</a:t>
               </a:r>
-              <a:endParaRPr lang="en-US" sz="1000" dirty="0"/>
+              <a:endParaRPr lang="en-US" sz="1050" dirty="0"/>
             </a:p>
           </p:txBody>
         </p:sp>
@@ -1379,6 +1383,13 @@
             <a:tailEnd type="arrow"/>
           </a:ln>
         </p:spPr>
+        <p:txBody>
+          <a:bodyPr/>
+          <a:lstStyle/>
+          <a:p>
+            <a:endParaRPr lang="es-ES"/>
+          </a:p>
+        </p:txBody>
       </p:sp>
       <p:sp>
         <p:nvSpPr>
@@ -1388,8 +1399,8 @@
         </p:nvSpPr>
         <p:spPr>
           <a:xfrm>
-            <a:off x="6297424" y="2587743"/>
-            <a:ext cx="5224016" cy="914400"/>
+            <a:off x="6297424" y="2490872"/>
+            <a:ext cx="4781254" cy="1082222"/>
           </a:xfrm>
           <a:prstGeom prst="rect">
             <a:avLst/>
@@ -1401,11 +1412,11 @@
           <a:bodyPr wrap="square" rtlCol="0" anchor="t"/>
           <a:lstStyle/>
           <a:p>
-            <a:pPr marL="0" indent="0" algn="ctr">
+            <a:pPr marL="0" indent="0" algn="just">
               <a:buNone/>
             </a:pPr>
             <a:r>
-              <a:rPr lang="en-US" sz="1600" b="1" dirty="0">
+              <a:rPr lang="en-US" sz="1600" dirty="0">
                 <a:solidFill>
                   <a:srgbClr val="8A2060"/>
                 </a:solidFill>
@@ -1421,7 +1432,7 @@
               <a:t>función</a:t>
             </a:r>
             <a:r>
-              <a:rPr lang="en-US" sz="1600" b="1" dirty="0">
+              <a:rPr lang="en-US" sz="1600" dirty="0">
                 <a:solidFill>
                   <a:srgbClr val="8A2060"/>
                 </a:solidFill>
@@ -1429,7 +1440,7 @@
               <a:t> de </a:t>
             </a:r>
             <a:r>
-              <a:rPr lang="en-US" sz="1600" b="1" dirty="0" err="1">
+              <a:rPr lang="en-US" sz="1600" dirty="0" err="1">
                 <a:solidFill>
                   <a:srgbClr val="8A2060"/>
                 </a:solidFill>
@@ -1437,7 +1448,7 @@
               <a:t>análisis</a:t>
             </a:r>
             <a:r>
-              <a:rPr lang="en-US" sz="1600" b="1" dirty="0">
+              <a:rPr lang="en-US" sz="1600" dirty="0">
                 <a:solidFill>
                   <a:srgbClr val="8A2060"/>
                 </a:solidFill>
@@ -1445,7 +1456,7 @@
               <a:t> </a:t>
             </a:r>
             <a:r>
-              <a:rPr lang="en-US" sz="1600" b="1" dirty="0" err="1">
+              <a:rPr lang="en-US" sz="1600" dirty="0" err="1">
                 <a:solidFill>
                   <a:srgbClr val="8A2060"/>
                 </a:solidFill>
@@ -1453,28 +1464,12 @@
               <a:t>comparativo</a:t>
             </a:r>
             <a:r>
-              <a:rPr lang="en-US" sz="1600" b="1" dirty="0">
+              <a:rPr lang="en-US" sz="1600" dirty="0">
                 <a:solidFill>
                   <a:srgbClr val="8A2060"/>
                 </a:solidFill>
               </a:rPr>
-              <a:t> evalúa la </a:t>
-            </a:r>
-            <a:r>
-              <a:rPr lang="en-US" sz="1600" b="1" dirty="0" err="1">
-                <a:solidFill>
-                  <a:srgbClr val="8A2060"/>
-                </a:solidFill>
-              </a:rPr>
-              <a:t>salida</a:t>
-            </a:r>
-            <a:r>
-              <a:rPr lang="en-US" sz="1600" b="1" dirty="0">
-                <a:solidFill>
-                  <a:srgbClr val="8A2060"/>
-                </a:solidFill>
-              </a:rPr>
-              <a:t> de </a:t>
+              <a:t> evalúa la salida de </a:t>
             </a:r>
             <a:r>
               <a:rPr lang="en-US" sz="1600" b="1" i="1" dirty="0" err="1">
@@ -1485,7 +1480,7 @@
               <a:t>process_proteomics</a:t>
             </a:r>
             <a:r>
-              <a:rPr lang="en-US" sz="1600" b="1" i="1" dirty="0">
+              <a:rPr lang="en-US" sz="1600" i="1" dirty="0">
                 <a:solidFill>
                   <a:srgbClr val="8A2060"/>
                 </a:solidFill>
@@ -1493,12 +1488,28 @@
               <a:t>()</a:t>
             </a:r>
             <a:r>
+              <a:rPr lang="en-US" sz="1600" dirty="0">
+                <a:solidFill>
+                  <a:srgbClr val="8A2060"/>
+                </a:solidFill>
+              </a:rPr>
+              <a:t>. </a:t>
+            </a:r>
+            <a:r>
               <a:rPr lang="en-US" sz="1600" b="1" dirty="0">
                 <a:solidFill>
                   <a:srgbClr val="8A2060"/>
                 </a:solidFill>
               </a:rPr>
-              <a:t>. Valida los </a:t>
+              <a:t>Valida</a:t>
+            </a:r>
+            <a:r>
+              <a:rPr lang="en-US" sz="1600" dirty="0">
+                <a:solidFill>
+                  <a:srgbClr val="8A2060"/>
+                </a:solidFill>
+              </a:rPr>
+              <a:t> los </a:t>
             </a:r>
             <a:r>
               <a:rPr lang="en-US" sz="1600" b="1" dirty="0" err="1">
@@ -1509,7 +1520,7 @@
               <a:t>métodos</a:t>
             </a:r>
             <a:r>
-              <a:rPr lang="en-US" sz="1600" b="1" dirty="0">
+              <a:rPr lang="en-US" sz="1600" dirty="0">
                 <a:solidFill>
                   <a:srgbClr val="8A2060"/>
                 </a:solidFill>
@@ -1517,7 +1528,7 @@
               <a:t> de </a:t>
             </a:r>
             <a:r>
-              <a:rPr lang="en-US" sz="1600" b="1" dirty="0" err="1">
+              <a:rPr lang="en-US" sz="1600" dirty="0" err="1">
                 <a:solidFill>
                   <a:srgbClr val="8A2060"/>
                 </a:solidFill>
@@ -1525,7 +1536,7 @@
               <a:t>normalización</a:t>
             </a:r>
             <a:r>
-              <a:rPr lang="en-US" sz="1600" b="1" dirty="0">
+              <a:rPr lang="en-US" sz="1600" dirty="0">
                 <a:solidFill>
                   <a:srgbClr val="8A2060"/>
                 </a:solidFill>
@@ -1533,7 +1544,7 @@
               <a:t> e imputación MAR y es la </a:t>
             </a:r>
             <a:r>
-              <a:rPr lang="en-US" sz="1600" b="1" dirty="0" err="1">
+              <a:rPr lang="en-US" sz="1600" dirty="0" err="1">
                 <a:solidFill>
                   <a:srgbClr val="8A2060"/>
                 </a:solidFill>
@@ -1541,7 +1552,7 @@
               <a:t>única</a:t>
             </a:r>
             <a:r>
-              <a:rPr lang="en-US" sz="1600" b="1" dirty="0">
+              <a:rPr lang="en-US" sz="1600" dirty="0">
                 <a:solidFill>
                   <a:srgbClr val="8A2060"/>
                 </a:solidFill>
@@ -1549,7 +1560,7 @@
               <a:t> </a:t>
             </a:r>
             <a:r>
-              <a:rPr lang="en-US" sz="1600" b="1" dirty="0" err="1">
+              <a:rPr lang="en-US" sz="1600" dirty="0" err="1">
                 <a:solidFill>
                   <a:srgbClr val="8A2060"/>
                 </a:solidFill>
@@ -1557,7 +1568,7 @@
               <a:t>opción</a:t>
             </a:r>
             <a:r>
-              <a:rPr lang="en-US" sz="1600" b="1" dirty="0">
+              <a:rPr lang="en-US" sz="1600" dirty="0">
                 <a:solidFill>
                   <a:srgbClr val="8A2060"/>
                 </a:solidFill>
@@ -1565,7 +1576,7 @@
               <a:t> en NADIA para </a:t>
             </a:r>
             <a:r>
-              <a:rPr lang="en-US" sz="1600" b="1" dirty="0" err="1">
+              <a:rPr lang="en-US" sz="1600" dirty="0" err="1">
                 <a:solidFill>
                   <a:srgbClr val="8A2060"/>
                 </a:solidFill>
@@ -1573,7 +1584,7 @@
               <a:t>evaluar</a:t>
             </a:r>
             <a:r>
-              <a:rPr lang="en-US" sz="1600" b="1" dirty="0">
+              <a:rPr lang="en-US" sz="1600" dirty="0">
                 <a:solidFill>
                   <a:srgbClr val="8A2060"/>
                 </a:solidFill>
@@ -1581,7 +1592,7 @@
               <a:t> </a:t>
             </a:r>
             <a:r>
-              <a:rPr lang="en-US" sz="1600" b="1" dirty="0" err="1">
+              <a:rPr lang="en-US" sz="1600" dirty="0" err="1">
                 <a:solidFill>
                   <a:srgbClr val="8A2060"/>
                 </a:solidFill>
@@ -1589,7 +1600,7 @@
               <a:t>métodos</a:t>
             </a:r>
             <a:r>
-              <a:rPr lang="en-US" sz="1600" b="1" dirty="0">
+              <a:rPr lang="en-US" sz="1600" dirty="0">
                 <a:solidFill>
                   <a:srgbClr val="8A2060"/>
                 </a:solidFill>
@@ -1614,8 +1625,8 @@
         </p:nvGrpSpPr>
         <p:grpSpPr>
           <a:xfrm>
-            <a:off x="6638926" y="3814868"/>
-            <a:ext cx="3474720" cy="822960"/>
+            <a:off x="6638925" y="3665889"/>
+            <a:ext cx="3708767" cy="971939"/>
             <a:chOff x="5120640" y="3383280"/>
             <a:chExt cx="3474720" cy="822960"/>
           </a:xfrm>
@@ -1646,6 +1657,13 @@
               <a:prstDash val="dash"/>
             </a:ln>
           </p:spPr>
+          <p:txBody>
+            <a:bodyPr/>
+            <a:lstStyle/>
+            <a:p>
+              <a:endParaRPr lang="es-ES"/>
+            </a:p>
+          </p:txBody>
         </p:sp>
         <p:sp>
           <p:nvSpPr>
@@ -1677,7 +1695,47 @@
                     <a:srgbClr val="8A2A5A"/>
                   </a:solidFill>
                 </a:rPr>
-                <a:t>Cuando hay proteínas spike-in disponibles</a:t>
+                <a:t>Cuando hay </a:t>
+              </a:r>
+              <a:r>
+                <a:rPr lang="en-US" sz="900" i="1" dirty="0" err="1">
+                  <a:solidFill>
+                    <a:srgbClr val="8A2A5A"/>
+                  </a:solidFill>
+                </a:rPr>
+                <a:t>proteínas</a:t>
+              </a:r>
+              <a:r>
+                <a:rPr lang="en-US" sz="900" i="1" dirty="0">
+                  <a:solidFill>
+                    <a:srgbClr val="8A2A5A"/>
+                  </a:solidFill>
+                </a:rPr>
+                <a:t> de </a:t>
+              </a:r>
+              <a:r>
+                <a:rPr lang="en-US" sz="900" i="1" dirty="0" err="1">
+                  <a:solidFill>
+                    <a:srgbClr val="8A2A5A"/>
+                  </a:solidFill>
+                </a:rPr>
+                <a:t>referencia</a:t>
+              </a:r>
+              <a:r>
+                <a:rPr lang="en-US" sz="900" i="1" dirty="0">
+                  <a:solidFill>
+                    <a:srgbClr val="8A2A5A"/>
+                  </a:solidFill>
+                </a:rPr>
+                <a:t> </a:t>
+              </a:r>
+              <a:r>
+                <a:rPr lang="en-US" sz="900" i="1" dirty="0" err="1">
+                  <a:solidFill>
+                    <a:srgbClr val="8A2A5A"/>
+                  </a:solidFill>
+                </a:rPr>
+                <a:t>disponibles</a:t>
               </a:r>
               <a:endParaRPr lang="en-US" sz="900" dirty="0"/>
             </a:p>
@@ -1708,14 +1766,38 @@
                 <a:buNone/>
               </a:pPr>
               <a:r>
-                <a:rPr lang="en-US" sz="1400" b="1" dirty="0">
+                <a:rPr lang="en-US" sz="1600" b="1" dirty="0">
                   <a:solidFill>
                     <a:srgbClr val="8A2060"/>
                   </a:solidFill>
                 </a:rPr>
-                <a:t>Benchmarking con proteínas spike-in</a:t>
-              </a:r>
-              <a:endParaRPr lang="en-US" sz="1400" dirty="0"/>
+                <a:t>Benchmarking con </a:t>
+              </a:r>
+              <a:r>
+                <a:rPr lang="en-US" sz="1600" b="1" dirty="0" err="1">
+                  <a:solidFill>
+                    <a:srgbClr val="8A2060"/>
+                  </a:solidFill>
+                </a:rPr>
+                <a:t>proteínas</a:t>
+              </a:r>
+              <a:r>
+                <a:rPr lang="en-US" sz="1600" b="1" dirty="0">
+                  <a:solidFill>
+                    <a:srgbClr val="8A2060"/>
+                  </a:solidFill>
+                </a:rPr>
+                <a:t> de </a:t>
+              </a:r>
+              <a:r>
+                <a:rPr lang="en-US" sz="1600" b="1" dirty="0" err="1">
+                  <a:solidFill>
+                    <a:srgbClr val="8A2060"/>
+                  </a:solidFill>
+                </a:rPr>
+                <a:t>referencia</a:t>
+              </a:r>
+              <a:endParaRPr lang="en-US" sz="1600" dirty="0"/>
             </a:p>
           </p:txBody>
         </p:sp>
@@ -1744,28 +1826,28 @@
                 <a:buNone/>
               </a:pPr>
               <a:r>
-                <a:rPr lang="en-US" sz="1000" i="1" dirty="0">
+                <a:rPr lang="en-US" sz="1050" i="1" dirty="0">
                   <a:solidFill>
                     <a:srgbClr val="8A2A5A"/>
                   </a:solidFill>
                 </a:rPr>
                 <a:t>benchmarking_proteomics()</a:t>
               </a:r>
-              <a:endParaRPr lang="en-US" sz="1000" dirty="0"/>
+              <a:endParaRPr lang="en-US" sz="1050" dirty="0"/>
             </a:p>
             <a:p>
               <a:pPr marL="0" indent="0" algn="ctr">
                 <a:buNone/>
               </a:pPr>
               <a:r>
-                <a:rPr lang="en-US" sz="1000" i="1" dirty="0">
+                <a:rPr lang="en-US" sz="1050" i="1" dirty="0">
                   <a:solidFill>
                     <a:srgbClr val="8A2A5A"/>
                   </a:solidFill>
                 </a:rPr>
                 <a:t>benchmarking_multiple()</a:t>
               </a:r>
-              <a:endParaRPr lang="en-US" sz="1000" dirty="0"/>
+              <a:endParaRPr lang="en-US" sz="1050" dirty="0"/>
             </a:p>
           </p:txBody>
         </p:sp>
@@ -1816,6 +1898,13 @@
               <a:prstDash val="solid"/>
             </a:ln>
           </p:spPr>
+          <p:txBody>
+            <a:bodyPr/>
+            <a:lstStyle/>
+            <a:p>
+              <a:endParaRPr lang="es-ES"/>
+            </a:p>
+          </p:txBody>
         </p:sp>
         <p:sp>
           <p:nvSpPr>
@@ -1878,14 +1967,14 @@
                 <a:buNone/>
               </a:pPr>
               <a:r>
-                <a:rPr lang="en-US" sz="1000" i="1" dirty="0">
+                <a:rPr lang="en-US" sz="1100" i="1" dirty="0">
                   <a:solidFill>
                     <a:srgbClr val="2A4A8A"/>
                   </a:solidFill>
                 </a:rPr>
                 <a:t>process_proteomics()</a:t>
               </a:r>
-              <a:endParaRPr lang="en-US" sz="1000" dirty="0"/>
+              <a:endParaRPr lang="en-US" sz="1100" dirty="0"/>
             </a:p>
           </p:txBody>
         </p:sp>
@@ -1913,6 +2002,13 @@
             <a:tailEnd type="arrow"/>
           </a:ln>
         </p:spPr>
+        <p:txBody>
+          <a:bodyPr/>
+          <a:lstStyle/>
+          <a:p>
+            <a:endParaRPr lang="es-ES"/>
+          </a:p>
+        </p:txBody>
       </p:sp>
       <p:sp>
         <p:nvSpPr>
@@ -1989,28 +2085,28 @@
               <a:buNone/>
             </a:pPr>
             <a:r>
-              <a:rPr lang="en-US" sz="1100" dirty="0">
+              <a:rPr lang="en-US" sz="1200" dirty="0">
                 <a:solidFill>
                   <a:srgbClr val="1A3A6B"/>
                 </a:solidFill>
               </a:rPr>
               <a:t>Métodos de normalización e</a:t>
             </a:r>
-            <a:endParaRPr lang="en-US" sz="1100" dirty="0"/>
+            <a:endParaRPr lang="en-US" sz="1200" dirty="0"/>
           </a:p>
           <a:p>
             <a:pPr marL="0" indent="0" algn="ctr">
               <a:buNone/>
             </a:pPr>
             <a:r>
-              <a:rPr lang="en-US" sz="1100" dirty="0">
+              <a:rPr lang="en-US" sz="1200" dirty="0">
                 <a:solidFill>
                   <a:srgbClr val="1A3A6B"/>
                 </a:solidFill>
               </a:rPr>
               <a:t>imputación seleccionados</a:t>
             </a:r>
-            <a:endParaRPr lang="en-US" sz="1100" dirty="0"/>
+            <a:endParaRPr lang="en-US" sz="1200" dirty="0"/>
           </a:p>
         </p:txBody>
       </p:sp>
@@ -2060,6 +2156,13 @@
               <a:prstDash val="solid"/>
             </a:ln>
           </p:spPr>
+          <p:txBody>
+            <a:bodyPr/>
+            <a:lstStyle/>
+            <a:p>
+              <a:endParaRPr lang="es-ES"/>
+            </a:p>
+          </p:txBody>
         </p:sp>
         <p:sp>
           <p:nvSpPr>
@@ -2086,14 +2189,14 @@
                 <a:buNone/>
               </a:pPr>
               <a:r>
-                <a:rPr lang="en-US" sz="1600" b="1" dirty="0">
+                <a:rPr lang="en-US" b="1" dirty="0">
                   <a:solidFill>
                     <a:srgbClr val="1A3A6B"/>
                   </a:solidFill>
                 </a:rPr>
                 <a:t>Análisis funcional</a:t>
               </a:r>
-              <a:endParaRPr lang="en-US" sz="1600" dirty="0"/>
+              <a:endParaRPr lang="en-US" dirty="0"/>
             </a:p>
           </p:txBody>
         </p:sp>
@@ -2144,6 +2247,13 @@
               <a:prstDash val="dash"/>
             </a:ln>
           </p:spPr>
+          <p:txBody>
+            <a:bodyPr/>
+            <a:lstStyle/>
+            <a:p>
+              <a:endParaRPr lang="es-ES"/>
+            </a:p>
+          </p:txBody>
         </p:sp>
         <p:sp>
           <p:nvSpPr>
@@ -2153,7 +2263,7 @@
           </p:nvSpPr>
           <p:spPr>
             <a:xfrm>
-              <a:off x="8961120" y="5321808"/>
+              <a:off x="8961120" y="5350683"/>
               <a:ext cx="2560320" cy="320040"/>
             </a:xfrm>
             <a:prstGeom prst="rect">
@@ -2170,14 +2280,14 @@
                 <a:buNone/>
               </a:pPr>
               <a:r>
-                <a:rPr lang="en-US" sz="1600" b="1" dirty="0">
+                <a:rPr lang="en-US" b="1" dirty="0">
                   <a:solidFill>
                     <a:srgbClr val="1A3A6B"/>
                   </a:solidFill>
                 </a:rPr>
                 <a:t>Perfilado de patrones</a:t>
               </a:r>
-              <a:endParaRPr lang="en-US" sz="1600" dirty="0"/>
+              <a:endParaRPr lang="en-US" dirty="0"/>
             </a:p>
           </p:txBody>
         </p:sp>
@@ -2241,6 +2351,13 @@
             <a:tailEnd type="arrow"/>
           </a:ln>
         </p:spPr>
+        <p:txBody>
+          <a:bodyPr/>
+          <a:lstStyle/>
+          <a:p>
+            <a:endParaRPr lang="es-ES"/>
+          </a:p>
+        </p:txBody>
       </p:sp>
       <p:sp>
         <p:nvSpPr>
@@ -2302,6 +2419,13 @@
             <a:tailEnd type="arrow"/>
           </a:ln>
         </p:spPr>
+        <p:txBody>
+          <a:bodyPr/>
+          <a:lstStyle/>
+          <a:p>
+            <a:endParaRPr lang="es-ES"/>
+          </a:p>
+        </p:txBody>
       </p:sp>
       <p:grpSp>
         <p:nvGrpSpPr>
@@ -2349,6 +2473,13 @@
               <a:prstDash val="solid"/>
             </a:ln>
           </p:spPr>
+          <p:txBody>
+            <a:bodyPr/>
+            <a:lstStyle/>
+            <a:p>
+              <a:endParaRPr lang="es-ES"/>
+            </a:p>
+          </p:txBody>
         </p:sp>
         <p:sp>
           <p:nvSpPr>
@@ -2375,7 +2506,7 @@
                 <a:buNone/>
               </a:pPr>
               <a:r>
-                <a:rPr lang="en-US" sz="1400" b="1" dirty="0">
+                <a:rPr lang="en-US" sz="1600" b="1" dirty="0">
                   <a:solidFill>
                     <a:srgbClr val="1A3A6B"/>
                   </a:solidFill>
@@ -2383,7 +2514,7 @@
                 <a:t>Análisis de </a:t>
               </a:r>
               <a:r>
-                <a:rPr lang="en-US" sz="1400" b="1" dirty="0" err="1">
+                <a:rPr lang="en-US" sz="1600" b="1" dirty="0" err="1">
                   <a:solidFill>
                     <a:srgbClr val="1A3A6B"/>
                   </a:solidFill>
@@ -2391,14 +2522,14 @@
                 <a:t>métricas</a:t>
               </a:r>
               <a:r>
-                <a:rPr lang="en-US" sz="1400" b="1" dirty="0">
+                <a:rPr lang="en-US" sz="1600" b="1" dirty="0">
                   <a:solidFill>
                     <a:srgbClr val="1A3A6B"/>
                   </a:solidFill>
                 </a:rPr>
                 <a:t> de normalización</a:t>
               </a:r>
-              <a:endParaRPr lang="en-US" sz="1400" dirty="0"/>
+              <a:endParaRPr lang="en-US" sz="1600" dirty="0"/>
             </a:p>
           </p:txBody>
         </p:sp>
@@ -2410,7 +2541,7 @@
           </p:nvSpPr>
           <p:spPr>
             <a:xfrm>
-              <a:off x="347472" y="3813048"/>
+              <a:off x="347472" y="3880423"/>
               <a:ext cx="2103120" cy="320040"/>
             </a:xfrm>
             <a:prstGeom prst="rect">
@@ -2499,6 +2630,13 @@
               <a:prstDash val="solid"/>
             </a:ln>
           </p:spPr>
+          <p:txBody>
+            <a:bodyPr/>
+            <a:lstStyle/>
+            <a:p>
+              <a:endParaRPr lang="es-ES"/>
+            </a:p>
+          </p:txBody>
         </p:sp>
         <p:sp>
           <p:nvSpPr>
@@ -2525,7 +2663,7 @@
                 <a:buNone/>
               </a:pPr>
               <a:r>
-                <a:rPr lang="en-US" sz="1400" b="1" dirty="0">
+                <a:rPr lang="en-US" sz="1600" b="1" dirty="0">
                   <a:solidFill>
                     <a:srgbClr val="1A3A6B"/>
                   </a:solidFill>
@@ -2533,7 +2671,7 @@
                 <a:t>Análisis de </a:t>
               </a:r>
               <a:r>
-                <a:rPr lang="en-US" sz="1400" b="1" dirty="0" err="1">
+                <a:rPr lang="en-US" sz="1600" b="1" dirty="0" err="1">
                   <a:solidFill>
                     <a:srgbClr val="1A3A6B"/>
                   </a:solidFill>
@@ -2541,12 +2679,12 @@
                 <a:t>métricas</a:t>
               </a:r>
               <a:r>
-                <a:rPr lang="en-US" sz="1400" b="1" dirty="0">
+                <a:rPr lang="en-US" sz="1600" b="1" dirty="0">
                   <a:solidFill>
                     <a:srgbClr val="1A3A6B"/>
                   </a:solidFill>
                 </a:rPr>
-                <a:t> de </a:t>
+                <a:t> </a:t>
               </a:r>
             </a:p>
             <a:p>
@@ -2554,14 +2692,22 @@
                 <a:buNone/>
               </a:pPr>
               <a:r>
-                <a:rPr lang="en-US" sz="1400" b="1" dirty="0" err="1">
+                <a:rPr lang="en-US" sz="1600" b="1" dirty="0">
                   <a:solidFill>
                     <a:srgbClr val="1A3A6B"/>
                   </a:solidFill>
                 </a:rPr>
+                <a:t>de </a:t>
+              </a:r>
+              <a:r>
+                <a:rPr lang="en-US" sz="1600" b="1" dirty="0" err="1">
+                  <a:solidFill>
+                    <a:srgbClr val="1A3A6B"/>
+                  </a:solidFill>
+                </a:rPr>
                 <a:t>imputación</a:t>
               </a:r>
-              <a:endParaRPr lang="en-US" sz="1400" dirty="0"/>
+              <a:endParaRPr lang="en-US" sz="1600" dirty="0"/>
             </a:p>
           </p:txBody>
         </p:sp>
@@ -2573,7 +2719,7 @@
           </p:nvSpPr>
           <p:spPr>
             <a:xfrm>
-              <a:off x="3129281" y="3721608"/>
+              <a:off x="3129281" y="3740858"/>
               <a:ext cx="2286000" cy="201168"/>
             </a:xfrm>
             <a:prstGeom prst="rect">
@@ -2726,6 +2872,107 @@
           </a:p>
         </p:txBody>
       </p:sp>
+      <p:grpSp>
+        <p:nvGrpSpPr>
+          <p:cNvPr id="62" name="Group 61">
+            <a:extLst>
+              <a:ext uri="{FF2B5EF4-FFF2-40B4-BE49-F238E27FC236}">
+                <a16:creationId xmlns:a16="http://schemas.microsoft.com/office/drawing/2014/main" id="{39E00A3A-6005-2279-AE6D-BAB7A77450DC}"/>
+              </a:ext>
+            </a:extLst>
+          </p:cNvPr>
+          <p:cNvGrpSpPr/>
+          <p:nvPr/>
+        </p:nvGrpSpPr>
+        <p:grpSpPr>
+          <a:xfrm>
+            <a:off x="224365" y="2012908"/>
+            <a:ext cx="395732" cy="404241"/>
+            <a:chOff x="201168" y="155448"/>
+            <a:chExt cx="256032" cy="256032"/>
+          </a:xfrm>
+        </p:grpSpPr>
+        <p:sp>
+          <p:nvSpPr>
+            <p:cNvPr id="63" name="circle_1">
+              <a:extLst>
+                <a:ext uri="{FF2B5EF4-FFF2-40B4-BE49-F238E27FC236}">
+                  <a16:creationId xmlns:a16="http://schemas.microsoft.com/office/drawing/2014/main" id="{26196404-1AB3-B4AB-2A97-4769E309C05A}"/>
+                </a:ext>
+              </a:extLst>
+            </p:cNvPr>
+            <p:cNvSpPr/>
+            <p:nvPr/>
+          </p:nvSpPr>
+          <p:spPr>
+            <a:xfrm>
+              <a:off x="201168" y="155448"/>
+              <a:ext cx="256032" cy="256032"/>
+            </a:xfrm>
+            <a:prstGeom prst="ellipse">
+              <a:avLst/>
+            </a:prstGeom>
+            <a:solidFill>
+              <a:srgbClr val="2A4A8A"/>
+            </a:solidFill>
+            <a:ln w="12700">
+              <a:solidFill>
+                <a:srgbClr val="2A4A8A"/>
+              </a:solidFill>
+              <a:prstDash val="solid"/>
+            </a:ln>
+          </p:spPr>
+          <p:txBody>
+            <a:bodyPr/>
+            <a:lstStyle/>
+            <a:p>
+              <a:endParaRPr lang="es-ES"/>
+            </a:p>
+          </p:txBody>
+        </p:sp>
+        <p:sp>
+          <p:nvSpPr>
+            <p:cNvPr id="64" name="label_1">
+              <a:extLst>
+                <a:ext uri="{FF2B5EF4-FFF2-40B4-BE49-F238E27FC236}">
+                  <a16:creationId xmlns:a16="http://schemas.microsoft.com/office/drawing/2014/main" id="{1CD0B602-5701-CB9B-B2ED-E00DCE94B197}"/>
+                </a:ext>
+              </a:extLst>
+            </p:cNvPr>
+            <p:cNvSpPr txBox="1"/>
+            <p:nvPr/>
+          </p:nvSpPr>
+          <p:spPr>
+            <a:xfrm>
+              <a:off x="201168" y="155448"/>
+              <a:ext cx="256032" cy="256032"/>
+            </a:xfrm>
+            <a:prstGeom prst="rect">
+              <a:avLst/>
+            </a:prstGeom>
+            <a:noFill/>
+            <a:ln/>
+          </p:spPr>
+          <p:txBody>
+            <a:bodyPr wrap="square" rtlCol="0" anchor="ctr"/>
+            <a:lstStyle/>
+            <a:p>
+              <a:pPr marL="0" indent="0" algn="ctr">
+                <a:buNone/>
+              </a:pPr>
+              <a:r>
+                <a:rPr lang="en-US" sz="2000" b="1" dirty="0">
+                  <a:solidFill>
+                    <a:srgbClr val="FFFFFF"/>
+                  </a:solidFill>
+                </a:rPr>
+                <a:t>2</a:t>
+              </a:r>
+              <a:endParaRPr lang="en-US" sz="2000" dirty="0"/>
+            </a:p>
+          </p:txBody>
+        </p:sp>
+      </p:grpSp>
     </p:spTree>
   </p:cSld>
   <p:clrMapOvr>
